--- a/presentations/01_CenGeometry_Introduction.pptx
+++ b/presentations/01_CenGeometry_Introduction.pptx
@@ -16,9 +16,10 @@
     <p:sldId id="264" r:id="rId10"/>
     <p:sldId id="265" r:id="rId11"/>
     <p:sldId id="266" r:id="rId12"/>
+    <p:sldId id="267" r:id="rId13"/>
   </p:sldIdLst>
   <p:notesMasterIdLst>
-    <p:notesMasterId r:id="rId13"/>
+    <p:notesMasterId r:id="rId14"/>
   </p:notesMasterIdLst>
   <p:sldSz cx="12192000" cy="6858000"/>
   <p:notesSz cx="6858000" cy="12192000"/>
@@ -712,6 +713,94 @@
             <a:fld id="{F7021451-1387-4CA6-816F-3879F97B5CBC}" type="slidenum">
               <a:rPr lang="en-US"/>
               <a:t>11</a:t>
+            </a:fld>
+            <a:endParaRPr lang="en-US"/>
+          </a:p>
+        </p:txBody>
+      </p:sp>
+    </p:spTree>
+    <p:extLst>
+      <p:ext uri="{BB962C8B-B14F-4D97-AF65-F5344CB8AC3E}">
+        <p14:creationId xmlns:p14="http://schemas.microsoft.com/office/powerpoint/2010/main" val="1024086991"/>
+      </p:ext>
+    </p:extLst>
+  </p:cSld>
+  <p:clrMapOvr>
+    <a:masterClrMapping/>
+  </p:clrMapOvr>
+</p:notes>
+</file>
+
+<file path=ppt/notesSlides/notesSlide12.xml><?xml version="1.0" encoding="utf-8"?>
+<p:notes xmlns:a="http://schemas.openxmlformats.org/drawingml/2006/main" xmlns:r="http://schemas.openxmlformats.org/officeDocument/2006/relationships" xmlns:p="http://schemas.openxmlformats.org/presentationml/2006/main">
+  <p:cSld>
+    <p:spTree>
+      <p:nvGrpSpPr>
+        <p:cNvPr id="1" name=""/>
+        <p:cNvGrpSpPr/>
+        <p:nvPr/>
+      </p:nvGrpSpPr>
+      <p:grpSpPr>
+        <a:xfrm>
+          <a:off x="0" y="0"/>
+          <a:ext cx="0" cy="0"/>
+          <a:chOff x="0" y="0"/>
+          <a:chExt cx="0" cy="0"/>
+        </a:xfrm>
+      </p:grpSpPr>
+      <p:sp>
+        <p:nvSpPr>
+          <p:cNvPr id="2" name="Slide Image Placeholder 1"/>
+          <p:cNvSpPr>
+            <a:spLocks noGrp="1" noRot="1" noChangeAspect="1"/>
+          </p:cNvSpPr>
+          <p:nvPr>
+            <p:ph type="sldImg"/>
+          </p:nvPr>
+        </p:nvSpPr>
+        <p:spPr/>
+      </p:sp>
+      <p:sp>
+        <p:nvSpPr>
+          <p:cNvPr id="3" name="Notes Placeholder 2"/>
+          <p:cNvSpPr>
+            <a:spLocks noGrp="1"/>
+          </p:cNvSpPr>
+          <p:nvPr>
+            <p:ph type="body" idx="1"/>
+          </p:nvPr>
+        </p:nvSpPr>
+        <p:spPr/>
+        <p:txBody>
+          <a:bodyPr/>
+          <a:lstStyle/>
+          <a:p>
+            <a:r>
+              <a:rPr lang="en-US" dirty="0"/>
+              <a:t/>
+            </a:r>
+            <a:endParaRPr lang="en-US" dirty="0"/>
+          </a:p>
+        </p:txBody>
+      </p:sp>
+      <p:sp>
+        <p:nvSpPr>
+          <p:cNvPr id="4" name="Slide Number Placeholder 3"/>
+          <p:cNvSpPr>
+            <a:spLocks noGrp="1"/>
+          </p:cNvSpPr>
+          <p:nvPr>
+            <p:ph type="sldNum" sz="quarter" idx="10"/>
+          </p:nvPr>
+        </p:nvSpPr>
+        <p:spPr/>
+        <p:txBody>
+          <a:bodyPr/>
+          <a:lstStyle/>
+          <a:p>
+            <a:fld id="{F7021451-1387-4CA6-816F-3879F97B5CBC}" type="slidenum">
+              <a:rPr lang="en-US"/>
+              <a:t>12</a:t>
             </a:fld>
             <a:endParaRPr lang="en-US"/>
           </a:p>
@@ -1996,6 +2085,199 @@
                 <a:ea typeface="Calibri" pitchFamily="34" charset="-122"/>
                 <a:cs typeface="Calibri" pitchFamily="34" charset="-120"/>
               </a:rPr>
+              <a:t>WHAT IT IS FOR</a:t>
+            </a:r>
+            <a:endParaRPr lang="en-US" sz="1200" dirty="0"/>
+          </a:p>
+        </p:txBody>
+      </p:sp>
+      <p:sp>
+        <p:nvSpPr>
+          <p:cNvPr id="3" name="Text 1"/>
+          <p:cNvSpPr/>
+          <p:nvPr/>
+        </p:nvSpPr>
+        <p:spPr>
+          <a:xfrm>
+            <a:off x="640080" y="566928"/>
+            <a:ext cx="10881360" cy="685800"/>
+          </a:xfrm>
+          <a:prstGeom prst="rect">
+            <a:avLst/>
+          </a:prstGeom>
+          <a:noFill/>
+          <a:ln/>
+        </p:spPr>
+        <p:txBody>
+          <a:bodyPr wrap="square" rtlCol="0" anchor="ctr"/>
+          <a:lstStyle/>
+          <a:p>
+            <a:pPr indent="0" marL="0">
+              <a:buNone/>
+            </a:pPr>
+            <a:r>
+              <a:rPr lang="en-US" sz="3400" b="1" dirty="0">
+                <a:solidFill>
+                  <a:srgbClr val="1A1A1A"/>
+                </a:solidFill>
+                <a:latin typeface="Cambria" pitchFamily="34" charset="0"/>
+                <a:ea typeface="Cambria" pitchFamily="34" charset="-122"/>
+                <a:cs typeface="Cambria" pitchFamily="34" charset="-120"/>
+              </a:rPr>
+              <a:t>A worked prediction: symmetry mismatch</a:t>
+            </a:r>
+            <a:endParaRPr lang="en-US" sz="3400" dirty="0"/>
+          </a:p>
+        </p:txBody>
+      </p:sp>
+      <p:pic>
+        <p:nvPicPr>
+          <p:cNvPr id="4" name="Image 0" descr="/Users/hatzopou/Dropbox/MyDocs/Scripts/CenGeom/presentations/figs/d_mismatch.png">    </p:cNvPr>
+          <p:cNvPicPr>
+            <a:picLocks noChangeAspect="1"/>
+          </p:cNvPicPr>
+          <p:nvPr/>
+        </p:nvPicPr>
+        <p:blipFill>
+          <a:blip r:embed="rId1"/>
+          <a:stretch>
+            <a:fillRect/>
+          </a:stretch>
+        </p:blipFill>
+        <p:spPr>
+          <a:xfrm>
+            <a:off x="502920" y="1234440"/>
+            <a:ext cx="11155680" cy="3931920"/>
+          </a:xfrm>
+          <a:prstGeom prst="rect">
+            <a:avLst/>
+          </a:prstGeom>
+        </p:spPr>
+      </p:pic>
+      <p:sp>
+        <p:nvSpPr>
+          <p:cNvPr id="5" name="Shape 2"/>
+          <p:cNvSpPr/>
+          <p:nvPr/>
+        </p:nvSpPr>
+        <p:spPr>
+          <a:xfrm>
+            <a:off x="640080" y="5349240"/>
+            <a:ext cx="10881360" cy="1143000"/>
+          </a:xfrm>
+          <a:prstGeom prst="roundRect">
+            <a:avLst>
+              <a:gd name="adj" fmla="val 6400"/>
+            </a:avLst>
+          </a:prstGeom>
+          <a:solidFill>
+            <a:srgbClr val="EDE7F6"/>
+          </a:solidFill>
+          <a:ln w="12700">
+            <a:solidFill>
+              <a:srgbClr val="EDE7F6"/>
+            </a:solidFill>
+            <a:prstDash val="solid"/>
+          </a:ln>
+        </p:spPr>
+      </p:sp>
+      <p:sp>
+        <p:nvSpPr>
+          <p:cNvPr id="6" name="Text 3"/>
+          <p:cNvSpPr/>
+          <p:nvPr/>
+        </p:nvSpPr>
+        <p:spPr>
+          <a:xfrm>
+            <a:off x="868680" y="5486400"/>
+            <a:ext cx="10424160" cy="914400"/>
+          </a:xfrm>
+          <a:prstGeom prst="rect">
+            <a:avLst/>
+          </a:prstGeom>
+          <a:noFill/>
+          <a:ln/>
+        </p:spPr>
+        <p:txBody>
+          <a:bodyPr wrap="square" lIns="0" tIns="0" rIns="0" bIns="0" rtlCol="0" anchor="ctr"/>
+          <a:lstStyle/>
+          <a:p>
+            <a:pPr indent="0" marL="0">
+              <a:buNone/>
+            </a:pPr>
+            <a:r>
+              <a:rPr lang="en-US" sz="1400" dirty="0">
+                <a:solidFill>
+                  <a:srgbClr val="4A2B7A"/>
+                </a:solidFill>
+                <a:latin typeface="Calibri" pitchFamily="34" charset="0"/>
+                <a:ea typeface="Calibri" pitchFamily="34" charset="-122"/>
+                <a:cs typeface="Calibri" pitchFamily="34" charset="-120"/>
+              </a:rPr>
+              <a:t>If SAS-6 makes an 8-fold cartwheel but nine triplets are still built, the model predicts the triplet ring keeps wild-type spacing and diameter (255 nm, unchanged) while the cartwheel absorbs the entire mismatch — spokes strained to HARD, one triplet left with no pinhead at all. A fully 8-fold centriole instead shrinks to 233 nm.</a:t>
+            </a:r>
+            <a:endParaRPr lang="en-US" sz="1400" dirty="0"/>
+          </a:p>
+        </p:txBody>
+      </p:sp>
+    </p:spTree>
+  </p:cSld>
+  <p:clrMapOvr>
+    <a:masterClrMapping/>
+  </p:clrMapOvr>
+</p:sld>
+</file>
+
+<file path=ppt/slides/slide11.xml><?xml version="1.0" encoding="utf-8"?>
+<p:sld xmlns:a="http://schemas.openxmlformats.org/drawingml/2006/main" xmlns:r="http://schemas.openxmlformats.org/officeDocument/2006/relationships" xmlns:p="http://schemas.openxmlformats.org/presentationml/2006/main">
+  <p:cSld name="Slide 11">
+    <p:spTree>
+      <p:nvGrpSpPr>
+        <p:cNvPr id="1" name=""/>
+        <p:cNvGrpSpPr/>
+        <p:nvPr/>
+      </p:nvGrpSpPr>
+      <p:grpSpPr>
+        <a:xfrm>
+          <a:off x="0" y="0"/>
+          <a:ext cx="0" cy="0"/>
+          <a:chOff x="0" y="0"/>
+          <a:chExt cx="0" cy="0"/>
+        </a:xfrm>
+      </p:grpSpPr>
+      <p:sp>
+        <p:nvSpPr>
+          <p:cNvPr id="2" name="Text 0"/>
+          <p:cNvSpPr/>
+          <p:nvPr/>
+        </p:nvSpPr>
+        <p:spPr>
+          <a:xfrm>
+            <a:off x="640080" y="310896"/>
+            <a:ext cx="10881360" cy="274320"/>
+          </a:xfrm>
+          <a:prstGeom prst="rect">
+            <a:avLst/>
+          </a:prstGeom>
+          <a:noFill/>
+          <a:ln/>
+        </p:spPr>
+        <p:txBody>
+          <a:bodyPr wrap="square" rtlCol="0" anchor="ctr"/>
+          <a:lstStyle/>
+          <a:p>
+            <a:pPr indent="0" marL="0">
+              <a:buNone/>
+            </a:pPr>
+            <a:r>
+              <a:rPr lang="en-US" sz="1200" b="1" spc="200" kern="0" dirty="0">
+                <a:solidFill>
+                  <a:srgbClr val="6B3FA0"/>
+                </a:solidFill>
+                <a:latin typeface="Calibri" pitchFamily="34" charset="0"/>
+                <a:ea typeface="Calibri" pitchFamily="34" charset="-122"/>
+                <a:cs typeface="Calibri" pitchFamily="34" charset="-120"/>
+              </a:rPr>
               <a:t>PRACTICALITIES</a:t>
             </a:r>
             <a:endParaRPr lang="en-US" sz="1200" dirty="0"/>
@@ -2764,9 +3046,9 @@
 </p:sld>
 </file>
 
-<file path=ppt/slides/slide11.xml><?xml version="1.0" encoding="utf-8"?>
+<file path=ppt/slides/slide12.xml><?xml version="1.0" encoding="utf-8"?>
 <p:sld xmlns:a="http://schemas.openxmlformats.org/drawingml/2006/main" xmlns:r="http://schemas.openxmlformats.org/officeDocument/2006/relationships" xmlns:p="http://schemas.openxmlformats.org/presentationml/2006/main">
-  <p:cSld name="Slide 11">
+  <p:cSld name="Slide 12">
     <p:bg>
       <p:bgPr>
         <a:solidFill>
@@ -2835,12 +3117,12 @@
         </p:nvSpPr>
         <p:spPr>
           <a:xfrm>
-            <a:off x="822960" y="1691640"/>
-            <a:ext cx="10515600" cy="960120"/>
+            <a:off x="822960" y="1572768"/>
+            <a:ext cx="10515600" cy="786384"/>
           </a:xfrm>
           <a:prstGeom prst="roundRect">
             <a:avLst>
-              <a:gd name="adj" fmla="val 5714"/>
+              <a:gd name="adj" fmla="val 6977"/>
             </a:avLst>
           </a:prstGeom>
           <a:solidFill>
@@ -2862,8 +3144,8 @@
         </p:nvSpPr>
         <p:spPr>
           <a:xfrm>
-            <a:off x="1097280" y="1783080"/>
-            <a:ext cx="4160520" cy="777240"/>
+            <a:off x="1097280" y="1627632"/>
+            <a:ext cx="4160520" cy="676656"/>
           </a:xfrm>
           <a:prstGeom prst="rect">
             <a:avLst/>
@@ -2879,7 +3161,7 @@
               <a:buNone/>
             </a:pPr>
             <a:r>
-              <a:rPr lang="en-US" sz="1600" b="1" dirty="0">
+              <a:rPr lang="en-US" sz="1450" b="1" dirty="0">
                 <a:solidFill>
                   <a:srgbClr val="2FA8A8"/>
                 </a:solidFill>
@@ -2889,7 +3171,7 @@
               </a:rPr>
               <a:t>It is not a physics simulation</a:t>
             </a:r>
-            <a:endParaRPr lang="en-US" sz="1600" dirty="0"/>
+            <a:endParaRPr lang="en-US" sz="1450" dirty="0"/>
           </a:p>
         </p:txBody>
       </p:sp>
@@ -2901,8 +3183,8 @@
         </p:nvSpPr>
         <p:spPr>
           <a:xfrm>
-            <a:off x="5349240" y="1810512"/>
-            <a:ext cx="5760720" cy="731520"/>
+            <a:off x="5349240" y="1627632"/>
+            <a:ext cx="5760720" cy="676656"/>
           </a:xfrm>
           <a:prstGeom prst="rect">
             <a:avLst/>
@@ -2918,7 +3200,7 @@
               <a:buNone/>
             </a:pPr>
             <a:r>
-              <a:rPr lang="en-US" sz="1300" dirty="0">
+              <a:rPr lang="en-US" sz="1200" dirty="0">
                 <a:solidFill>
                   <a:srgbClr val="C9C4DB"/>
                 </a:solidFill>
@@ -2928,7 +3210,7 @@
               </a:rPr>
               <a:t>It is a geometric and mechanical model for generating hypotheses. Bond strengths are a rank ordering, not measured energies.</a:t>
             </a:r>
-            <a:endParaRPr lang="en-US" sz="1300" dirty="0"/>
+            <a:endParaRPr lang="en-US" sz="1200" dirty="0"/>
           </a:p>
         </p:txBody>
       </p:sp>
@@ -2940,12 +3222,12 @@
         </p:nvSpPr>
         <p:spPr>
           <a:xfrm>
-            <a:off x="822960" y="2807208"/>
-            <a:ext cx="10515600" cy="960120"/>
+            <a:off x="822960" y="2478024"/>
+            <a:ext cx="10515600" cy="786384"/>
           </a:xfrm>
           <a:prstGeom prst="roundRect">
             <a:avLst>
-              <a:gd name="adj" fmla="val 5714"/>
+              <a:gd name="adj" fmla="val 6977"/>
             </a:avLst>
           </a:prstGeom>
           <a:solidFill>
@@ -2967,8 +3249,8 @@
         </p:nvSpPr>
         <p:spPr>
           <a:xfrm>
-            <a:off x="1097280" y="2898648"/>
-            <a:ext cx="4160520" cy="777240"/>
+            <a:off x="1097280" y="2532888"/>
+            <a:ext cx="4160520" cy="676656"/>
           </a:xfrm>
           <a:prstGeom prst="rect">
             <a:avLst/>
@@ -2984,7 +3266,7 @@
               <a:buNone/>
             </a:pPr>
             <a:r>
-              <a:rPr lang="en-US" sz="1600" b="1" dirty="0">
+              <a:rPr lang="en-US" sz="1450" b="1" dirty="0">
                 <a:solidFill>
                   <a:srgbClr val="2FA8A8"/>
                 </a:solidFill>
@@ -2994,7 +3276,7 @@
               </a:rPr>
               <a:t>The joint thresholds are reasoned, not measured</a:t>
             </a:r>
-            <a:endParaRPr lang="en-US" sz="1600" dirty="0"/>
+            <a:endParaRPr lang="en-US" sz="1450" dirty="0"/>
           </a:p>
         </p:txBody>
       </p:sp>
@@ -3006,8 +3288,8 @@
         </p:nvSpPr>
         <p:spPr>
           <a:xfrm>
-            <a:off x="5349240" y="2926080"/>
-            <a:ext cx="5760720" cy="731520"/>
+            <a:off x="5349240" y="2532888"/>
+            <a:ext cx="5760720" cy="676656"/>
           </a:xfrm>
           <a:prstGeom prst="rect">
             <a:avLst/>
@@ -3023,7 +3305,7 @@
               <a:buNone/>
             </a:pPr>
             <a:r>
-              <a:rPr lang="en-US" sz="1300" dirty="0">
+              <a:rPr lang="en-US" sz="1200" dirty="0">
                 <a:solidFill>
                   <a:srgbClr val="C9C4DB"/>
                 </a:solidFill>
@@ -3031,9 +3313,9 @@
                 <a:ea typeface="Calibri" pitchFamily="34" charset="-122"/>
                 <a:cs typeface="Calibri" pitchFamily="34" charset="-120"/>
               </a:rPr>
-              <a:t>No sub-tomogram angular variance was available to calibrate OK / HARD / FORBIDDEN. Their rank ordering is defensible; the absolute numbers are not.</a:t>
+              <a:t>No sub-tomogram angular variance was available to calibrate OK / HARD / SEVERE. Their rank ordering is defensible; the absolute numbers are not.</a:t>
             </a:r>
-            <a:endParaRPr lang="en-US" sz="1300" dirty="0"/>
+            <a:endParaRPr lang="en-US" sz="1200" dirty="0"/>
           </a:p>
         </p:txBody>
       </p:sp>
@@ -3045,12 +3327,12 @@
         </p:nvSpPr>
         <p:spPr>
           <a:xfrm>
-            <a:off x="822960" y="3922776"/>
-            <a:ext cx="10515600" cy="960120"/>
+            <a:off x="822960" y="3383280"/>
+            <a:ext cx="10515600" cy="786384"/>
           </a:xfrm>
           <a:prstGeom prst="roundRect">
             <a:avLst>
-              <a:gd name="adj" fmla="val 5714"/>
+              <a:gd name="adj" fmla="val 6977"/>
             </a:avLst>
           </a:prstGeom>
           <a:solidFill>
@@ -3072,8 +3354,8 @@
         </p:nvSpPr>
         <p:spPr>
           <a:xfrm>
-            <a:off x="1097280" y="4014216"/>
-            <a:ext cx="4160520" cy="777240"/>
+            <a:off x="1097280" y="3438144"/>
+            <a:ext cx="4160520" cy="676656"/>
           </a:xfrm>
           <a:prstGeom prst="rect">
             <a:avLst/>
@@ -3089,7 +3371,7 @@
               <a:buNone/>
             </a:pPr>
             <a:r>
-              <a:rPr lang="en-US" sz="1600" b="1" dirty="0">
+              <a:rPr lang="en-US" sz="1450" b="1" dirty="0">
                 <a:solidFill>
                   <a:srgbClr val="2FA8A8"/>
                 </a:solidFill>
@@ -3099,7 +3381,7 @@
               </a:rPr>
               <a:t>It is a single 2D cross-section</a:t>
             </a:r>
-            <a:endParaRPr lang="en-US" sz="1600" dirty="0"/>
+            <a:endParaRPr lang="en-US" sz="1450" dirty="0"/>
           </a:p>
         </p:txBody>
       </p:sp>
@@ -3111,8 +3393,8 @@
         </p:nvSpPr>
         <p:spPr>
           <a:xfrm>
-            <a:off x="5349240" y="4041648"/>
-            <a:ext cx="5760720" cy="731520"/>
+            <a:off x="5349240" y="3438144"/>
+            <a:ext cx="5760720" cy="676656"/>
           </a:xfrm>
           <a:prstGeom prst="rect">
             <a:avLst/>
@@ -3128,7 +3410,7 @@
               <a:buNone/>
             </a:pPr>
             <a:r>
-              <a:rPr lang="en-US" sz="1300" dirty="0">
+              <a:rPr lang="en-US" sz="1200" dirty="0">
                 <a:solidFill>
                   <a:srgbClr val="C9C4DB"/>
                 </a:solidFill>
@@ -3138,7 +3420,7 @@
               </a:rPr>
               <a:t>The real centriole twists along its length. Anything longitudinal is outside its scope.</a:t>
             </a:r>
-            <a:endParaRPr lang="en-US" sz="1300" dirty="0"/>
+            <a:endParaRPr lang="en-US" sz="1200" dirty="0"/>
           </a:p>
         </p:txBody>
       </p:sp>
@@ -3150,12 +3432,12 @@
         </p:nvSpPr>
         <p:spPr>
           <a:xfrm>
-            <a:off x="822960" y="5038344"/>
-            <a:ext cx="10515600" cy="960120"/>
+            <a:off x="822960" y="4288536"/>
+            <a:ext cx="10515600" cy="786384"/>
           </a:xfrm>
           <a:prstGeom prst="roundRect">
             <a:avLst>
-              <a:gd name="adj" fmla="val 5714"/>
+              <a:gd name="adj" fmla="val 6977"/>
             </a:avLst>
           </a:prstGeom>
           <a:solidFill>
@@ -3177,8 +3459,8 @@
         </p:nvSpPr>
         <p:spPr>
           <a:xfrm>
-            <a:off x="1097280" y="5129784"/>
-            <a:ext cx="4160520" cy="777240"/>
+            <a:off x="1097280" y="4343400"/>
+            <a:ext cx="4160520" cy="676656"/>
           </a:xfrm>
           <a:prstGeom prst="rect">
             <a:avLst/>
@@ -3194,7 +3476,112 @@
               <a:buNone/>
             </a:pPr>
             <a:r>
-              <a:rPr lang="en-US" sz="1600" b="1" dirty="0">
+              <a:rPr lang="en-US" sz="1450" b="1" dirty="0">
+                <a:solidFill>
+                  <a:srgbClr val="2FA8A8"/>
+                </a:solidFill>
+                <a:latin typeface="Calibri" pitchFamily="34" charset="0"/>
+                <a:ea typeface="Calibri" pitchFamily="34" charset="-122"/>
+                <a:cs typeface="Calibri" pitchFamily="34" charset="-120"/>
+              </a:rPr>
+              <a:t>Grades are not feasibility verdicts</a:t>
+            </a:r>
+            <a:endParaRPr lang="en-US" sz="1450" dirty="0"/>
+          </a:p>
+        </p:txBody>
+      </p:sp>
+      <p:sp>
+        <p:nvSpPr>
+          <p:cNvPr id="14" name="Text 12"/>
+          <p:cNvSpPr/>
+          <p:nvPr/>
+        </p:nvSpPr>
+        <p:spPr>
+          <a:xfrm>
+            <a:off x="5349240" y="4343400"/>
+            <a:ext cx="5760720" cy="676656"/>
+          </a:xfrm>
+          <a:prstGeom prst="rect">
+            <a:avLst/>
+          </a:prstGeom>
+          <a:noFill/>
+          <a:ln/>
+        </p:spPr>
+        <p:txBody>
+          <a:bodyPr wrap="square" lIns="0" tIns="0" rIns="0" bIns="0" rtlCol="0" anchor="ctr"/>
+          <a:lstStyle/>
+          <a:p>
+            <a:pPr indent="0" marL="0">
+              <a:buNone/>
+            </a:pPr>
+            <a:r>
+              <a:rPr lang="en-US" sz="1200" dirty="0">
+                <a:solidFill>
+                  <a:srgbClr val="C9C4DB"/>
+                </a:solidFill>
+                <a:latin typeface="Calibri" pitchFamily="34" charset="0"/>
+                <a:ea typeface="Calibri" pitchFamily="34" charset="-122"/>
+                <a:cs typeface="Calibri" pitchFamily="34" charset="-120"/>
+              </a:rPr>
+              <a:t>The tolerances were reasoned, not measured. Structures assemble in conditions graded SEVERE.</a:t>
+            </a:r>
+            <a:endParaRPr lang="en-US" sz="1200" dirty="0"/>
+          </a:p>
+        </p:txBody>
+      </p:sp>
+      <p:sp>
+        <p:nvSpPr>
+          <p:cNvPr id="15" name="Shape 13"/>
+          <p:cNvSpPr/>
+          <p:nvPr/>
+        </p:nvSpPr>
+        <p:spPr>
+          <a:xfrm>
+            <a:off x="822960" y="5193792"/>
+            <a:ext cx="10515600" cy="786384"/>
+          </a:xfrm>
+          <a:prstGeom prst="roundRect">
+            <a:avLst>
+              <a:gd name="adj" fmla="val 6977"/>
+            </a:avLst>
+          </a:prstGeom>
+          <a:solidFill>
+            <a:srgbClr val="2A1B4D"/>
+          </a:solidFill>
+          <a:ln w="12700">
+            <a:solidFill>
+              <a:srgbClr val="2A1B4D"/>
+            </a:solidFill>
+            <a:prstDash val="solid"/>
+          </a:ln>
+        </p:spPr>
+      </p:sp>
+      <p:sp>
+        <p:nvSpPr>
+          <p:cNvPr id="16" name="Text 14"/>
+          <p:cNvSpPr/>
+          <p:nvPr/>
+        </p:nvSpPr>
+        <p:spPr>
+          <a:xfrm>
+            <a:off x="1097280" y="5248656"/>
+            <a:ext cx="4160520" cy="676656"/>
+          </a:xfrm>
+          <a:prstGeom prst="rect">
+            <a:avLst/>
+          </a:prstGeom>
+          <a:noFill/>
+          <a:ln/>
+        </p:spPr>
+        <p:txBody>
+          <a:bodyPr wrap="square" lIns="0" tIns="0" rIns="0" bIns="0" rtlCol="0" anchor="ctr"/>
+          <a:lstStyle/>
+          <a:p>
+            <a:pPr indent="0" marL="0">
+              <a:buNone/>
+            </a:pPr>
+            <a:r>
+              <a:rPr lang="en-US" sz="1450" b="1" dirty="0">
                 <a:solidFill>
                   <a:srgbClr val="2FA8A8"/>
                 </a:solidFill>
@@ -3204,20 +3591,20 @@
               </a:rPr>
               <a:t>Calibration rests on one schematic</a:t>
             </a:r>
-            <a:endParaRPr lang="en-US" sz="1600" dirty="0"/>
+            <a:endParaRPr lang="en-US" sz="1450" dirty="0"/>
           </a:p>
         </p:txBody>
       </p:sp>
       <p:sp>
         <p:nvSpPr>
-          <p:cNvPr id="14" name="Text 12"/>
+          <p:cNvPr id="17" name="Text 15"/>
           <p:cNvSpPr/>
           <p:nvPr/>
         </p:nvSpPr>
         <p:spPr>
           <a:xfrm>
-            <a:off x="5349240" y="5157216"/>
-            <a:ext cx="5760720" cy="731520"/>
+            <a:off x="5349240" y="5248656"/>
+            <a:ext cx="5760720" cy="676656"/>
           </a:xfrm>
           <a:prstGeom prst="rect">
             <a:avLst/>
@@ -3233,7 +3620,7 @@
               <a:buNone/>
             </a:pPr>
             <a:r>
-              <a:rPr lang="en-US" sz="1300" dirty="0">
+              <a:rPr lang="en-US" sz="1200" dirty="0">
                 <a:solidFill>
                   <a:srgbClr val="C9C4DB"/>
                 </a:solidFill>
@@ -3243,13 +3630,13 @@
               </a:rPr>
               <a:t>Protofilament positions carry about 2° (~0.4 nm) of reading noise, which sets the precision floor.</a:t>
             </a:r>
-            <a:endParaRPr lang="en-US" sz="1300" dirty="0"/>
+            <a:endParaRPr lang="en-US" sz="1200" dirty="0"/>
           </a:p>
         </p:txBody>
       </p:sp>
       <p:sp>
         <p:nvSpPr>
-          <p:cNvPr id="15" name="Text 13"/>
+          <p:cNvPr id="18" name="Text 16"/>
           <p:cNvSpPr/>
           <p:nvPr/>
         </p:nvSpPr>
@@ -8124,7 +8511,7 @@
                 <a:ea typeface="Cambria" pitchFamily="34" charset="-122"/>
                 <a:cs typeface="Cambria" pitchFamily="34" charset="-120"/>
               </a:rPr>
-              <a:t>Parts cannot overlap</a:t>
+              <a:t>Connections cannot separate</a:t>
             </a:r>
             <a:endParaRPr lang="en-US" sz="1800" dirty="0"/>
           </a:p>
@@ -8163,7 +8550,7 @@
                 <a:ea typeface="Calibri" pitchFamily="34" charset="-122"/>
                 <a:cs typeface="Calibri" pitchFamily="34" charset="-120"/>
               </a:rPr>
-              <a:t>Microtubules repel on contact; the clearance of every strand against every tubule is measured.</a:t>
+              <a:t>Each body is built onto the one that feeds it, so a connection point holds exactly — by construction, not by penalty.</a:t>
             </a:r>
             <a:endParaRPr lang="en-US" sz="1400" dirty="0"/>
           </a:p>
@@ -8202,7 +8589,7 @@
                 <a:ea typeface="Calibri" pitchFamily="34" charset="-122"/>
                 <a:cs typeface="Calibri" pitchFamily="34" charset="-120"/>
               </a:rPr>
-              <a:t>Grades: OK (comfortable)  ·  HARD (strained but achievable)  ·  FORBIDDEN (very costly)</a:t>
+              <a:t>Grades: OK  ·  HARD  ·  SEVERE — assumed tolerances, not feasibility verdicts</a:t>
             </a:r>
             <a:endParaRPr lang="en-US" sz="1400" dirty="0"/>
           </a:p>
@@ -8266,6 +8653,2878 @@
                 <a:ea typeface="Calibri" pitchFamily="34" charset="-122"/>
                 <a:cs typeface="Calibri" pitchFamily="34" charset="-120"/>
               </a:rPr>
+              <a:t>HOW STRAIN IS GRADED</a:t>
+            </a:r>
+            <a:endParaRPr lang="en-US" sz="1200" dirty="0"/>
+          </a:p>
+        </p:txBody>
+      </p:sp>
+      <p:sp>
+        <p:nvSpPr>
+          <p:cNvPr id="3" name="Text 1"/>
+          <p:cNvSpPr/>
+          <p:nvPr/>
+        </p:nvSpPr>
+        <p:spPr>
+          <a:xfrm>
+            <a:off x="640080" y="566928"/>
+            <a:ext cx="10881360" cy="685800"/>
+          </a:xfrm>
+          <a:prstGeom prst="rect">
+            <a:avLst/>
+          </a:prstGeom>
+          <a:noFill/>
+          <a:ln/>
+        </p:spPr>
+        <p:txBody>
+          <a:bodyPr wrap="square" rtlCol="0" anchor="ctr"/>
+          <a:lstStyle/>
+          <a:p>
+            <a:pPr indent="0" marL="0">
+              <a:buNone/>
+            </a:pPr>
+            <a:r>
+              <a:rPr lang="en-US" sz="3400" b="1" dirty="0">
+                <a:solidFill>
+                  <a:srgbClr val="1A1A1A"/>
+                </a:solidFill>
+                <a:latin typeface="Cambria" pitchFamily="34" charset="0"/>
+                <a:ea typeface="Cambria" pitchFamily="34" charset="-122"/>
+                <a:cs typeface="Cambria" pitchFamily="34" charset="-120"/>
+              </a:rPr>
+              <a:t>Every joint has its own tolerance</a:t>
+            </a:r>
+            <a:endParaRPr lang="en-US" sz="3400" dirty="0"/>
+          </a:p>
+        </p:txBody>
+      </p:sp>
+      <p:sp>
+        <p:nvSpPr>
+          <p:cNvPr id="4" name="Text 2"/>
+          <p:cNvSpPr/>
+          <p:nvPr/>
+        </p:nvSpPr>
+        <p:spPr>
+          <a:xfrm>
+            <a:off x="640080" y="1298448"/>
+            <a:ext cx="10881360" cy="685800"/>
+          </a:xfrm>
+          <a:prstGeom prst="rect">
+            <a:avLst/>
+          </a:prstGeom>
+          <a:noFill/>
+          <a:ln/>
+        </p:spPr>
+        <p:txBody>
+          <a:bodyPr wrap="square" rtlCol="0" anchor="ctr"/>
+          <a:lstStyle/>
+          <a:p>
+            <a:pPr indent="0" marL="0">
+              <a:buNone/>
+            </a:pPr>
+            <a:r>
+              <a:rPr lang="en-US" sz="1500" dirty="0">
+                <a:solidFill>
+                  <a:srgbClr val="6B7280"/>
+                </a:solidFill>
+                <a:latin typeface="Calibri" pitchFamily="34" charset="0"/>
+                <a:ea typeface="Calibri" pitchFamily="34" charset="-122"/>
+                <a:cs typeface="Calibri" pitchFamily="34" charset="-120"/>
+              </a:rPr>
+              <a:t>A rotation means different things at different connections. 15° at the base of the 45 nm spoke moves its tip 11.6 nm — a whole tubule radius — while the same angle at a 13 nm linker arm moves it 3.4 nm. So each is graded against its own limits.</a:t>
+            </a:r>
+            <a:endParaRPr lang="en-US" sz="1500" dirty="0"/>
+          </a:p>
+        </p:txBody>
+      </p:sp>
+      <p:graphicFrame>
+        <p:nvGraphicFramePr>
+          <p:cNvPr id="8" name="Table 0"/>
+          <p:cNvGraphicFramePr>
+            <a:graphicFrameLocks noGrp="1"/>
+          </p:cNvGraphicFramePr>
+          <p:nvPr>
+            <p:extLst>
+              <p:ext uri="{D42A27DB-BD31-4B8C-83A1-F6EECF244321}">
+                <p14:modId xmlns:p14="http://schemas.microsoft.com/office/powerpoint/2010/main" val="1579011935"/>
+              </p:ext>
+            </p:extLst>
+          </p:nvPr>
+        </p:nvGraphicFramePr>
+        <p:xfrm>
+          <a:off x="640080" y="2103120"/>
+          <a:ext cx="10881360" cy="914400"/>
+        </p:xfrm>
+        <a:graphic>
+          <a:graphicData uri="http://schemas.openxmlformats.org/drawingml/2006/table">
+            <a:tbl>
+              <a:tblPr/>
+              <a:tblGrid>
+                <a:gridCol w="2651760"/>
+                <a:gridCol w="914400"/>
+                <a:gridCol w="1188720"/>
+                <a:gridCol w="1097280"/>
+                <a:gridCol w="5029200"/>
+              </a:tblGrid>
+              <a:tr h="411480">
+                <a:tc>
+                  <a:txBody>
+                    <a:bodyPr/>
+                    <a:lstStyle/>
+                    <a:p>
+                      <a:pPr indent="0" marL="0">
+                        <a:buNone/>
+                      </a:pPr>
+                      <a:r>
+                        <a:rPr lang="en-US" sz="1250" b="1" dirty="0">
+                          <a:solidFill>
+                            <a:srgbClr val="FFFFFF"/>
+                          </a:solidFill>
+                          <a:latin typeface="Calibri" pitchFamily="34" charset="0"/>
+                          <a:ea typeface="Calibri" pitchFamily="34" charset="-122"/>
+                          <a:cs typeface="Calibri" pitchFamily="34" charset="-120"/>
+                        </a:rPr>
+                        <a:t>Joint / contact</a:t>
+                      </a:r>
+                      <a:endParaRPr lang="en-US" sz="1250" dirty="0">
+                        <a:latin typeface="Calibri" charset="0"/>
+                        <a:ea typeface="Calibri" charset="0"/>
+                        <a:cs typeface="Calibri" charset="0"/>
+                      </a:endParaRPr>
+                    </a:p>
+                  </a:txBody>
+                  <a:tcPr marL="91440" marR="91440" marT="45720" marB="45720" anchor="ctr">
+                    <a:lnL w="12700" cap="flat" cmpd="sng" algn="ctr">
+                      <a:solidFill>
+                        <a:srgbClr val="E3E0EC"/>
+                      </a:solidFill>
+                      <a:prstDash val="solid"/>
+                      <a:round/>
+                      <a:headEnd type="none" w="med" len="med"/>
+                      <a:tailEnd type="none" w="med" len="med"/>
+                    </a:lnL>
+                    <a:lnR w="12700" cap="flat" cmpd="sng" algn="ctr">
+                      <a:solidFill>
+                        <a:srgbClr val="E3E0EC"/>
+                      </a:solidFill>
+                      <a:prstDash val="solid"/>
+                      <a:round/>
+                      <a:headEnd type="none" w="med" len="med"/>
+                      <a:tailEnd type="none" w="med" len="med"/>
+                    </a:lnR>
+                    <a:lnT w="12700" cap="flat" cmpd="sng" algn="ctr">
+                      <a:solidFill>
+                        <a:srgbClr val="E3E0EC"/>
+                      </a:solidFill>
+                      <a:prstDash val="solid"/>
+                      <a:round/>
+                      <a:headEnd type="none" w="med" len="med"/>
+                      <a:tailEnd type="none" w="med" len="med"/>
+                    </a:lnT>
+                    <a:lnB w="12700" cap="flat" cmpd="sng" algn="ctr">
+                      <a:solidFill>
+                        <a:srgbClr val="E3E0EC"/>
+                      </a:solidFill>
+                      <a:prstDash val="solid"/>
+                      <a:round/>
+                      <a:headEnd type="none" w="med" len="med"/>
+                      <a:tailEnd type="none" w="med" len="med"/>
+                    </a:lnB>
+                    <a:solidFill>
+                      <a:srgbClr val="6B3FA0"/>
+                    </a:solidFill>
+                  </a:tcPr>
+                </a:tc>
+                <a:tc>
+                  <a:txBody>
+                    <a:bodyPr/>
+                    <a:lstStyle/>
+                    <a:p>
+                      <a:pPr indent="0" marL="0">
+                        <a:buNone/>
+                      </a:pPr>
+                      <a:r>
+                        <a:rPr lang="en-US" sz="1250" b="1" dirty="0">
+                          <a:solidFill>
+                            <a:srgbClr val="FFFFFF"/>
+                          </a:solidFill>
+                          <a:latin typeface="Calibri" pitchFamily="34" charset="0"/>
+                          <a:ea typeface="Calibri" pitchFamily="34" charset="-122"/>
+                          <a:cs typeface="Calibri" pitchFamily="34" charset="-120"/>
+                        </a:rPr>
+                        <a:t>OK</a:t>
+                      </a:r>
+                      <a:endParaRPr lang="en-US" sz="1250" dirty="0">
+                        <a:latin typeface="Calibri" charset="0"/>
+                        <a:ea typeface="Calibri" charset="0"/>
+                        <a:cs typeface="Calibri" charset="0"/>
+                      </a:endParaRPr>
+                    </a:p>
+                  </a:txBody>
+                  <a:tcPr marL="91440" marR="91440" marT="45720" marB="45720" anchor="ctr">
+                    <a:lnL w="12700" cap="flat" cmpd="sng" algn="ctr">
+                      <a:solidFill>
+                        <a:srgbClr val="E3E0EC"/>
+                      </a:solidFill>
+                      <a:prstDash val="solid"/>
+                      <a:round/>
+                      <a:headEnd type="none" w="med" len="med"/>
+                      <a:tailEnd type="none" w="med" len="med"/>
+                    </a:lnL>
+                    <a:lnR w="12700" cap="flat" cmpd="sng" algn="ctr">
+                      <a:solidFill>
+                        <a:srgbClr val="E3E0EC"/>
+                      </a:solidFill>
+                      <a:prstDash val="solid"/>
+                      <a:round/>
+                      <a:headEnd type="none" w="med" len="med"/>
+                      <a:tailEnd type="none" w="med" len="med"/>
+                    </a:lnR>
+                    <a:lnT w="12700" cap="flat" cmpd="sng" algn="ctr">
+                      <a:solidFill>
+                        <a:srgbClr val="E3E0EC"/>
+                      </a:solidFill>
+                      <a:prstDash val="solid"/>
+                      <a:round/>
+                      <a:headEnd type="none" w="med" len="med"/>
+                      <a:tailEnd type="none" w="med" len="med"/>
+                    </a:lnT>
+                    <a:lnB w="12700" cap="flat" cmpd="sng" algn="ctr">
+                      <a:solidFill>
+                        <a:srgbClr val="E3E0EC"/>
+                      </a:solidFill>
+                      <a:prstDash val="solid"/>
+                      <a:round/>
+                      <a:headEnd type="none" w="med" len="med"/>
+                      <a:tailEnd type="none" w="med" len="med"/>
+                    </a:lnB>
+                    <a:solidFill>
+                      <a:srgbClr val="6B3FA0"/>
+                    </a:solidFill>
+                  </a:tcPr>
+                </a:tc>
+                <a:tc>
+                  <a:txBody>
+                    <a:bodyPr/>
+                    <a:lstStyle/>
+                    <a:p>
+                      <a:pPr indent="0" marL="0">
+                        <a:buNone/>
+                      </a:pPr>
+                      <a:r>
+                        <a:rPr lang="en-US" sz="1250" b="1" dirty="0">
+                          <a:solidFill>
+                            <a:srgbClr val="FFFFFF"/>
+                          </a:solidFill>
+                          <a:latin typeface="Calibri" pitchFamily="34" charset="0"/>
+                          <a:ea typeface="Calibri" pitchFamily="34" charset="-122"/>
+                          <a:cs typeface="Calibri" pitchFamily="34" charset="-120"/>
+                        </a:rPr>
+                        <a:t>HARD</a:t>
+                      </a:r>
+                      <a:endParaRPr lang="en-US" sz="1250" dirty="0">
+                        <a:latin typeface="Calibri" charset="0"/>
+                        <a:ea typeface="Calibri" charset="0"/>
+                        <a:cs typeface="Calibri" charset="0"/>
+                      </a:endParaRPr>
+                    </a:p>
+                  </a:txBody>
+                  <a:tcPr marL="91440" marR="91440" marT="45720" marB="45720" anchor="ctr">
+                    <a:lnL w="12700" cap="flat" cmpd="sng" algn="ctr">
+                      <a:solidFill>
+                        <a:srgbClr val="E3E0EC"/>
+                      </a:solidFill>
+                      <a:prstDash val="solid"/>
+                      <a:round/>
+                      <a:headEnd type="none" w="med" len="med"/>
+                      <a:tailEnd type="none" w="med" len="med"/>
+                    </a:lnL>
+                    <a:lnR w="12700" cap="flat" cmpd="sng" algn="ctr">
+                      <a:solidFill>
+                        <a:srgbClr val="E3E0EC"/>
+                      </a:solidFill>
+                      <a:prstDash val="solid"/>
+                      <a:round/>
+                      <a:headEnd type="none" w="med" len="med"/>
+                      <a:tailEnd type="none" w="med" len="med"/>
+                    </a:lnR>
+                    <a:lnT w="12700" cap="flat" cmpd="sng" algn="ctr">
+                      <a:solidFill>
+                        <a:srgbClr val="E3E0EC"/>
+                      </a:solidFill>
+                      <a:prstDash val="solid"/>
+                      <a:round/>
+                      <a:headEnd type="none" w="med" len="med"/>
+                      <a:tailEnd type="none" w="med" len="med"/>
+                    </a:lnT>
+                    <a:lnB w="12700" cap="flat" cmpd="sng" algn="ctr">
+                      <a:solidFill>
+                        <a:srgbClr val="E3E0EC"/>
+                      </a:solidFill>
+                      <a:prstDash val="solid"/>
+                      <a:round/>
+                      <a:headEnd type="none" w="med" len="med"/>
+                      <a:tailEnd type="none" w="med" len="med"/>
+                    </a:lnB>
+                    <a:solidFill>
+                      <a:srgbClr val="6B3FA0"/>
+                    </a:solidFill>
+                  </a:tcPr>
+                </a:tc>
+                <a:tc>
+                  <a:txBody>
+                    <a:bodyPr/>
+                    <a:lstStyle/>
+                    <a:p>
+                      <a:pPr indent="0" marL="0">
+                        <a:buNone/>
+                      </a:pPr>
+                      <a:r>
+                        <a:rPr lang="en-US" sz="1250" b="1" dirty="0">
+                          <a:solidFill>
+                            <a:srgbClr val="FFFFFF"/>
+                          </a:solidFill>
+                          <a:latin typeface="Calibri" pitchFamily="34" charset="0"/>
+                          <a:ea typeface="Calibri" pitchFamily="34" charset="-122"/>
+                          <a:cs typeface="Calibri" pitchFamily="34" charset="-120"/>
+                        </a:rPr>
+                        <a:t>SEVERE</a:t>
+                      </a:r>
+                      <a:endParaRPr lang="en-US" sz="1250" dirty="0">
+                        <a:latin typeface="Calibri" charset="0"/>
+                        <a:ea typeface="Calibri" charset="0"/>
+                        <a:cs typeface="Calibri" charset="0"/>
+                      </a:endParaRPr>
+                    </a:p>
+                  </a:txBody>
+                  <a:tcPr marL="91440" marR="91440" marT="45720" marB="45720" anchor="ctr">
+                    <a:lnL w="12700" cap="flat" cmpd="sng" algn="ctr">
+                      <a:solidFill>
+                        <a:srgbClr val="E3E0EC"/>
+                      </a:solidFill>
+                      <a:prstDash val="solid"/>
+                      <a:round/>
+                      <a:headEnd type="none" w="med" len="med"/>
+                      <a:tailEnd type="none" w="med" len="med"/>
+                    </a:lnL>
+                    <a:lnR w="12700" cap="flat" cmpd="sng" algn="ctr">
+                      <a:solidFill>
+                        <a:srgbClr val="E3E0EC"/>
+                      </a:solidFill>
+                      <a:prstDash val="solid"/>
+                      <a:round/>
+                      <a:headEnd type="none" w="med" len="med"/>
+                      <a:tailEnd type="none" w="med" len="med"/>
+                    </a:lnR>
+                    <a:lnT w="12700" cap="flat" cmpd="sng" algn="ctr">
+                      <a:solidFill>
+                        <a:srgbClr val="E3E0EC"/>
+                      </a:solidFill>
+                      <a:prstDash val="solid"/>
+                      <a:round/>
+                      <a:headEnd type="none" w="med" len="med"/>
+                      <a:tailEnd type="none" w="med" len="med"/>
+                    </a:lnT>
+                    <a:lnB w="12700" cap="flat" cmpd="sng" algn="ctr">
+                      <a:solidFill>
+                        <a:srgbClr val="E3E0EC"/>
+                      </a:solidFill>
+                      <a:prstDash val="solid"/>
+                      <a:round/>
+                      <a:headEnd type="none" w="med" len="med"/>
+                      <a:tailEnd type="none" w="med" len="med"/>
+                    </a:lnB>
+                    <a:solidFill>
+                      <a:srgbClr val="6B3FA0"/>
+                    </a:solidFill>
+                  </a:tcPr>
+                </a:tc>
+                <a:tc>
+                  <a:txBody>
+                    <a:bodyPr/>
+                    <a:lstStyle/>
+                    <a:p>
+                      <a:pPr indent="0" marL="0">
+                        <a:buNone/>
+                      </a:pPr>
+                      <a:r>
+                        <a:rPr lang="en-US" sz="1250" b="1" dirty="0">
+                          <a:solidFill>
+                            <a:srgbClr val="FFFFFF"/>
+                          </a:solidFill>
+                          <a:latin typeface="Calibri" pitchFamily="34" charset="0"/>
+                          <a:ea typeface="Calibri" pitchFamily="34" charset="-122"/>
+                          <a:cs typeface="Calibri" pitchFamily="34" charset="-120"/>
+                        </a:rPr>
+                        <a:t>Why</a:t>
+                      </a:r>
+                      <a:endParaRPr lang="en-US" sz="1250" dirty="0">
+                        <a:latin typeface="Calibri" charset="0"/>
+                        <a:ea typeface="Calibri" charset="0"/>
+                        <a:cs typeface="Calibri" charset="0"/>
+                      </a:endParaRPr>
+                    </a:p>
+                  </a:txBody>
+                  <a:tcPr marL="91440" marR="91440" marT="45720" marB="45720" anchor="ctr">
+                    <a:lnL w="12700" cap="flat" cmpd="sng" algn="ctr">
+                      <a:solidFill>
+                        <a:srgbClr val="E3E0EC"/>
+                      </a:solidFill>
+                      <a:prstDash val="solid"/>
+                      <a:round/>
+                      <a:headEnd type="none" w="med" len="med"/>
+                      <a:tailEnd type="none" w="med" len="med"/>
+                    </a:lnL>
+                    <a:lnR w="12700" cap="flat" cmpd="sng" algn="ctr">
+                      <a:solidFill>
+                        <a:srgbClr val="E3E0EC"/>
+                      </a:solidFill>
+                      <a:prstDash val="solid"/>
+                      <a:round/>
+                      <a:headEnd type="none" w="med" len="med"/>
+                      <a:tailEnd type="none" w="med" len="med"/>
+                    </a:lnR>
+                    <a:lnT w="12700" cap="flat" cmpd="sng" algn="ctr">
+                      <a:solidFill>
+                        <a:srgbClr val="E3E0EC"/>
+                      </a:solidFill>
+                      <a:prstDash val="solid"/>
+                      <a:round/>
+                      <a:headEnd type="none" w="med" len="med"/>
+                      <a:tailEnd type="none" w="med" len="med"/>
+                    </a:lnT>
+                    <a:lnB w="12700" cap="flat" cmpd="sng" algn="ctr">
+                      <a:solidFill>
+                        <a:srgbClr val="E3E0EC"/>
+                      </a:solidFill>
+                      <a:prstDash val="solid"/>
+                      <a:round/>
+                      <a:headEnd type="none" w="med" len="med"/>
+                      <a:tailEnd type="none" w="med" len="med"/>
+                    </a:lnB>
+                    <a:solidFill>
+                      <a:srgbClr val="6B3FA0"/>
+                    </a:solidFill>
+                  </a:tcPr>
+                </a:tc>
+              </a:tr>
+              <a:tr h="411480">
+                <a:tc>
+                  <a:txBody>
+                    <a:bodyPr/>
+                    <a:lstStyle/>
+                    <a:p>
+                      <a:pPr indent="0" marL="0">
+                        <a:buNone/>
+                      </a:pPr>
+                      <a:r>
+                        <a:rPr lang="en-US" sz="1250" dirty="0">
+                          <a:solidFill>
+                            <a:srgbClr val="000000"/>
+                          </a:solidFill>
+                          <a:latin typeface="Calibri" pitchFamily="34" charset="0"/>
+                          <a:ea typeface="Calibri" pitchFamily="34" charset="-122"/>
+                          <a:cs typeface="Calibri" pitchFamily="34" charset="-120"/>
+                        </a:rPr>
+                        <a:t>Linker to A-tubule</a:t>
+                      </a:r>
+                      <a:endParaRPr lang="en-US" sz="1250" dirty="0">
+                        <a:latin typeface="Calibri" charset="0"/>
+                        <a:ea typeface="Calibri" charset="0"/>
+                        <a:cs typeface="Calibri" charset="0"/>
+                      </a:endParaRPr>
+                    </a:p>
+                  </a:txBody>
+                  <a:tcPr marL="91440" marR="91440" marT="45720" marB="45720" anchor="ctr">
+                    <a:lnL w="12700" cap="flat" cmpd="sng" algn="ctr">
+                      <a:solidFill>
+                        <a:srgbClr val="E3E0EC"/>
+                      </a:solidFill>
+                      <a:prstDash val="solid"/>
+                      <a:round/>
+                      <a:headEnd type="none" w="med" len="med"/>
+                      <a:tailEnd type="none" w="med" len="med"/>
+                    </a:lnL>
+                    <a:lnR w="12700" cap="flat" cmpd="sng" algn="ctr">
+                      <a:solidFill>
+                        <a:srgbClr val="E3E0EC"/>
+                      </a:solidFill>
+                      <a:prstDash val="solid"/>
+                      <a:round/>
+                      <a:headEnd type="none" w="med" len="med"/>
+                      <a:tailEnd type="none" w="med" len="med"/>
+                    </a:lnR>
+                    <a:lnT w="12700" cap="flat" cmpd="sng" algn="ctr">
+                      <a:solidFill>
+                        <a:srgbClr val="E3E0EC"/>
+                      </a:solidFill>
+                      <a:prstDash val="solid"/>
+                      <a:round/>
+                      <a:headEnd type="none" w="med" len="med"/>
+                      <a:tailEnd type="none" w="med" len="med"/>
+                    </a:lnT>
+                    <a:lnB w="12700" cap="flat" cmpd="sng" algn="ctr">
+                      <a:solidFill>
+                        <a:srgbClr val="E3E0EC"/>
+                      </a:solidFill>
+                      <a:prstDash val="solid"/>
+                      <a:round/>
+                      <a:headEnd type="none" w="med" len="med"/>
+                      <a:tailEnd type="none" w="med" len="med"/>
+                    </a:lnB>
+                  </a:tcPr>
+                </a:tc>
+                <a:tc>
+                  <a:txBody>
+                    <a:bodyPr/>
+                    <a:lstStyle/>
+                    <a:p>
+                      <a:pPr indent="0" marL="0">
+                        <a:buNone/>
+                      </a:pPr>
+                      <a:r>
+                        <a:rPr lang="en-US" sz="1250" dirty="0">
+                          <a:solidFill>
+                            <a:srgbClr val="000000"/>
+                          </a:solidFill>
+                          <a:latin typeface="Calibri" pitchFamily="34" charset="0"/>
+                          <a:ea typeface="Calibri" pitchFamily="34" charset="-122"/>
+                          <a:cs typeface="Calibri" pitchFamily="34" charset="-120"/>
+                        </a:rPr>
+                        <a:t>8°</a:t>
+                      </a:r>
+                      <a:endParaRPr lang="en-US" sz="1250" dirty="0">
+                        <a:latin typeface="Calibri" charset="0"/>
+                        <a:ea typeface="Calibri" charset="0"/>
+                        <a:cs typeface="Calibri" charset="0"/>
+                      </a:endParaRPr>
+                    </a:p>
+                  </a:txBody>
+                  <a:tcPr marL="91440" marR="91440" marT="45720" marB="45720" anchor="ctr">
+                    <a:lnL w="12700" cap="flat" cmpd="sng" algn="ctr">
+                      <a:solidFill>
+                        <a:srgbClr val="E3E0EC"/>
+                      </a:solidFill>
+                      <a:prstDash val="solid"/>
+                      <a:round/>
+                      <a:headEnd type="none" w="med" len="med"/>
+                      <a:tailEnd type="none" w="med" len="med"/>
+                    </a:lnL>
+                    <a:lnR w="12700" cap="flat" cmpd="sng" algn="ctr">
+                      <a:solidFill>
+                        <a:srgbClr val="E3E0EC"/>
+                      </a:solidFill>
+                      <a:prstDash val="solid"/>
+                      <a:round/>
+                      <a:headEnd type="none" w="med" len="med"/>
+                      <a:tailEnd type="none" w="med" len="med"/>
+                    </a:lnR>
+                    <a:lnT w="12700" cap="flat" cmpd="sng" algn="ctr">
+                      <a:solidFill>
+                        <a:srgbClr val="E3E0EC"/>
+                      </a:solidFill>
+                      <a:prstDash val="solid"/>
+                      <a:round/>
+                      <a:headEnd type="none" w="med" len="med"/>
+                      <a:tailEnd type="none" w="med" len="med"/>
+                    </a:lnT>
+                    <a:lnB w="12700" cap="flat" cmpd="sng" algn="ctr">
+                      <a:solidFill>
+                        <a:srgbClr val="E3E0EC"/>
+                      </a:solidFill>
+                      <a:prstDash val="solid"/>
+                      <a:round/>
+                      <a:headEnd type="none" w="med" len="med"/>
+                      <a:tailEnd type="none" w="med" len="med"/>
+                    </a:lnB>
+                  </a:tcPr>
+                </a:tc>
+                <a:tc>
+                  <a:txBody>
+                    <a:bodyPr/>
+                    <a:lstStyle/>
+                    <a:p>
+                      <a:pPr indent="0" marL="0">
+                        <a:buNone/>
+                      </a:pPr>
+                      <a:r>
+                        <a:rPr lang="en-US" sz="1250" dirty="0">
+                          <a:solidFill>
+                            <a:srgbClr val="000000"/>
+                          </a:solidFill>
+                          <a:latin typeface="Calibri" pitchFamily="34" charset="0"/>
+                          <a:ea typeface="Calibri" pitchFamily="34" charset="-122"/>
+                          <a:cs typeface="Calibri" pitchFamily="34" charset="-120"/>
+                        </a:rPr>
+                        <a:t>8–20°</a:t>
+                      </a:r>
+                      <a:endParaRPr lang="en-US" sz="1250" dirty="0">
+                        <a:latin typeface="Calibri" charset="0"/>
+                        <a:ea typeface="Calibri" charset="0"/>
+                        <a:cs typeface="Calibri" charset="0"/>
+                      </a:endParaRPr>
+                    </a:p>
+                  </a:txBody>
+                  <a:tcPr marL="91440" marR="91440" marT="45720" marB="45720" anchor="ctr">
+                    <a:lnL w="12700" cap="flat" cmpd="sng" algn="ctr">
+                      <a:solidFill>
+                        <a:srgbClr val="E3E0EC"/>
+                      </a:solidFill>
+                      <a:prstDash val="solid"/>
+                      <a:round/>
+                      <a:headEnd type="none" w="med" len="med"/>
+                      <a:tailEnd type="none" w="med" len="med"/>
+                    </a:lnL>
+                    <a:lnR w="12700" cap="flat" cmpd="sng" algn="ctr">
+                      <a:solidFill>
+                        <a:srgbClr val="E3E0EC"/>
+                      </a:solidFill>
+                      <a:prstDash val="solid"/>
+                      <a:round/>
+                      <a:headEnd type="none" w="med" len="med"/>
+                      <a:tailEnd type="none" w="med" len="med"/>
+                    </a:lnR>
+                    <a:lnT w="12700" cap="flat" cmpd="sng" algn="ctr">
+                      <a:solidFill>
+                        <a:srgbClr val="E3E0EC"/>
+                      </a:solidFill>
+                      <a:prstDash val="solid"/>
+                      <a:round/>
+                      <a:headEnd type="none" w="med" len="med"/>
+                      <a:tailEnd type="none" w="med" len="med"/>
+                    </a:lnT>
+                    <a:lnB w="12700" cap="flat" cmpd="sng" algn="ctr">
+                      <a:solidFill>
+                        <a:srgbClr val="E3E0EC"/>
+                      </a:solidFill>
+                      <a:prstDash val="solid"/>
+                      <a:round/>
+                      <a:headEnd type="none" w="med" len="med"/>
+                      <a:tailEnd type="none" w="med" len="med"/>
+                    </a:lnB>
+                  </a:tcPr>
+                </a:tc>
+                <a:tc>
+                  <a:txBody>
+                    <a:bodyPr/>
+                    <a:lstStyle/>
+                    <a:p>
+                      <a:pPr indent="0" marL="0">
+                        <a:buNone/>
+                      </a:pPr>
+                      <a:r>
+                        <a:rPr lang="en-US" sz="1250" dirty="0">
+                          <a:solidFill>
+                            <a:srgbClr val="000000"/>
+                          </a:solidFill>
+                          <a:latin typeface="Calibri" pitchFamily="34" charset="0"/>
+                          <a:ea typeface="Calibri" pitchFamily="34" charset="-122"/>
+                          <a:cs typeface="Calibri" pitchFamily="34" charset="-120"/>
+                        </a:rPr>
+                        <a:t>&gt; 20°</a:t>
+                      </a:r>
+                      <a:endParaRPr lang="en-US" sz="1250" dirty="0">
+                        <a:latin typeface="Calibri" charset="0"/>
+                        <a:ea typeface="Calibri" charset="0"/>
+                        <a:cs typeface="Calibri" charset="0"/>
+                      </a:endParaRPr>
+                    </a:p>
+                  </a:txBody>
+                  <a:tcPr marL="91440" marR="91440" marT="45720" marB="45720" anchor="ctr">
+                    <a:lnL w="12700" cap="flat" cmpd="sng" algn="ctr">
+                      <a:solidFill>
+                        <a:srgbClr val="E3E0EC"/>
+                      </a:solidFill>
+                      <a:prstDash val="solid"/>
+                      <a:round/>
+                      <a:headEnd type="none" w="med" len="med"/>
+                      <a:tailEnd type="none" w="med" len="med"/>
+                    </a:lnL>
+                    <a:lnR w="12700" cap="flat" cmpd="sng" algn="ctr">
+                      <a:solidFill>
+                        <a:srgbClr val="E3E0EC"/>
+                      </a:solidFill>
+                      <a:prstDash val="solid"/>
+                      <a:round/>
+                      <a:headEnd type="none" w="med" len="med"/>
+                      <a:tailEnd type="none" w="med" len="med"/>
+                    </a:lnR>
+                    <a:lnT w="12700" cap="flat" cmpd="sng" algn="ctr">
+                      <a:solidFill>
+                        <a:srgbClr val="E3E0EC"/>
+                      </a:solidFill>
+                      <a:prstDash val="solid"/>
+                      <a:round/>
+                      <a:headEnd type="none" w="med" len="med"/>
+                      <a:tailEnd type="none" w="med" len="med"/>
+                    </a:lnT>
+                    <a:lnB w="12700" cap="flat" cmpd="sng" algn="ctr">
+                      <a:solidFill>
+                        <a:srgbClr val="E3E0EC"/>
+                      </a:solidFill>
+                      <a:prstDash val="solid"/>
+                      <a:round/>
+                      <a:headEnd type="none" w="med" len="med"/>
+                      <a:tailEnd type="none" w="med" len="med"/>
+                    </a:lnB>
+                  </a:tcPr>
+                </a:tc>
+                <a:tc>
+                  <a:txBody>
+                    <a:bodyPr/>
+                    <a:lstStyle/>
+                    <a:p>
+                      <a:pPr indent="0" marL="0">
+                        <a:buNone/>
+                      </a:pPr>
+                      <a:r>
+                        <a:rPr lang="en-US" sz="1250" dirty="0">
+                          <a:solidFill>
+                            <a:srgbClr val="000000"/>
+                          </a:solidFill>
+                          <a:latin typeface="Calibri" pitchFamily="34" charset="0"/>
+                          <a:ea typeface="Calibri" pitchFamily="34" charset="-122"/>
+                          <a:cs typeface="Calibri" pitchFamily="34" charset="-120"/>
+                        </a:rPr>
+                        <a:t>grips a rigid, ordered lattice</a:t>
+                      </a:r>
+                      <a:endParaRPr lang="en-US" sz="1250" dirty="0">
+                        <a:latin typeface="Calibri" charset="0"/>
+                        <a:ea typeface="Calibri" charset="0"/>
+                        <a:cs typeface="Calibri" charset="0"/>
+                      </a:endParaRPr>
+                    </a:p>
+                  </a:txBody>
+                  <a:tcPr marL="91440" marR="91440" marT="45720" marB="45720" anchor="ctr">
+                    <a:lnL w="12700" cap="flat" cmpd="sng" algn="ctr">
+                      <a:solidFill>
+                        <a:srgbClr val="E3E0EC"/>
+                      </a:solidFill>
+                      <a:prstDash val="solid"/>
+                      <a:round/>
+                      <a:headEnd type="none" w="med" len="med"/>
+                      <a:tailEnd type="none" w="med" len="med"/>
+                    </a:lnL>
+                    <a:lnR w="12700" cap="flat" cmpd="sng" algn="ctr">
+                      <a:solidFill>
+                        <a:srgbClr val="E3E0EC"/>
+                      </a:solidFill>
+                      <a:prstDash val="solid"/>
+                      <a:round/>
+                      <a:headEnd type="none" w="med" len="med"/>
+                      <a:tailEnd type="none" w="med" len="med"/>
+                    </a:lnR>
+                    <a:lnT w="12700" cap="flat" cmpd="sng" algn="ctr">
+                      <a:solidFill>
+                        <a:srgbClr val="E3E0EC"/>
+                      </a:solidFill>
+                      <a:prstDash val="solid"/>
+                      <a:round/>
+                      <a:headEnd type="none" w="med" len="med"/>
+                      <a:tailEnd type="none" w="med" len="med"/>
+                    </a:lnT>
+                    <a:lnB w="12700" cap="flat" cmpd="sng" algn="ctr">
+                      <a:solidFill>
+                        <a:srgbClr val="E3E0EC"/>
+                      </a:solidFill>
+                      <a:prstDash val="solid"/>
+                      <a:round/>
+                      <a:headEnd type="none" w="med" len="med"/>
+                      <a:tailEnd type="none" w="med" len="med"/>
+                    </a:lnB>
+                  </a:tcPr>
+                </a:tc>
+              </a:tr>
+              <a:tr h="411480">
+                <a:tc>
+                  <a:txBody>
+                    <a:bodyPr/>
+                    <a:lstStyle/>
+                    <a:p>
+                      <a:pPr indent="0" marL="0">
+                        <a:buNone/>
+                      </a:pPr>
+                      <a:r>
+                        <a:rPr lang="en-US" sz="1250" dirty="0">
+                          <a:solidFill>
+                            <a:srgbClr val="000000"/>
+                          </a:solidFill>
+                          <a:latin typeface="Calibri" pitchFamily="34" charset="0"/>
+                          <a:ea typeface="Calibri" pitchFamily="34" charset="-122"/>
+                          <a:cs typeface="Calibri" pitchFamily="34" charset="-120"/>
+                        </a:rPr>
+                        <a:t>Linker to C-tubule</a:t>
+                      </a:r>
+                      <a:endParaRPr lang="en-US" sz="1250" dirty="0">
+                        <a:latin typeface="Calibri" charset="0"/>
+                        <a:ea typeface="Calibri" charset="0"/>
+                        <a:cs typeface="Calibri" charset="0"/>
+                      </a:endParaRPr>
+                    </a:p>
+                  </a:txBody>
+                  <a:tcPr marL="91440" marR="91440" marT="45720" marB="45720" anchor="ctr">
+                    <a:lnL w="12700" cap="flat" cmpd="sng" algn="ctr">
+                      <a:solidFill>
+                        <a:srgbClr val="E3E0EC"/>
+                      </a:solidFill>
+                      <a:prstDash val="solid"/>
+                      <a:round/>
+                      <a:headEnd type="none" w="med" len="med"/>
+                      <a:tailEnd type="none" w="med" len="med"/>
+                    </a:lnL>
+                    <a:lnR w="12700" cap="flat" cmpd="sng" algn="ctr">
+                      <a:solidFill>
+                        <a:srgbClr val="E3E0EC"/>
+                      </a:solidFill>
+                      <a:prstDash val="solid"/>
+                      <a:round/>
+                      <a:headEnd type="none" w="med" len="med"/>
+                      <a:tailEnd type="none" w="med" len="med"/>
+                    </a:lnR>
+                    <a:lnT w="12700" cap="flat" cmpd="sng" algn="ctr">
+                      <a:solidFill>
+                        <a:srgbClr val="E3E0EC"/>
+                      </a:solidFill>
+                      <a:prstDash val="solid"/>
+                      <a:round/>
+                      <a:headEnd type="none" w="med" len="med"/>
+                      <a:tailEnd type="none" w="med" len="med"/>
+                    </a:lnT>
+                    <a:lnB w="12700" cap="flat" cmpd="sng" algn="ctr">
+                      <a:solidFill>
+                        <a:srgbClr val="E3E0EC"/>
+                      </a:solidFill>
+                      <a:prstDash val="solid"/>
+                      <a:round/>
+                      <a:headEnd type="none" w="med" len="med"/>
+                      <a:tailEnd type="none" w="med" len="med"/>
+                    </a:lnB>
+                  </a:tcPr>
+                </a:tc>
+                <a:tc>
+                  <a:txBody>
+                    <a:bodyPr/>
+                    <a:lstStyle/>
+                    <a:p>
+                      <a:pPr indent="0" marL="0">
+                        <a:buNone/>
+                      </a:pPr>
+                      <a:r>
+                        <a:rPr lang="en-US" sz="1250" dirty="0">
+                          <a:solidFill>
+                            <a:srgbClr val="000000"/>
+                          </a:solidFill>
+                          <a:latin typeface="Calibri" pitchFamily="34" charset="0"/>
+                          <a:ea typeface="Calibri" pitchFamily="34" charset="-122"/>
+                          <a:cs typeface="Calibri" pitchFamily="34" charset="-120"/>
+                        </a:rPr>
+                        <a:t>8°</a:t>
+                      </a:r>
+                      <a:endParaRPr lang="en-US" sz="1250" dirty="0">
+                        <a:latin typeface="Calibri" charset="0"/>
+                        <a:ea typeface="Calibri" charset="0"/>
+                        <a:cs typeface="Calibri" charset="0"/>
+                      </a:endParaRPr>
+                    </a:p>
+                  </a:txBody>
+                  <a:tcPr marL="91440" marR="91440" marT="45720" marB="45720" anchor="ctr">
+                    <a:lnL w="12700" cap="flat" cmpd="sng" algn="ctr">
+                      <a:solidFill>
+                        <a:srgbClr val="E3E0EC"/>
+                      </a:solidFill>
+                      <a:prstDash val="solid"/>
+                      <a:round/>
+                      <a:headEnd type="none" w="med" len="med"/>
+                      <a:tailEnd type="none" w="med" len="med"/>
+                    </a:lnL>
+                    <a:lnR w="12700" cap="flat" cmpd="sng" algn="ctr">
+                      <a:solidFill>
+                        <a:srgbClr val="E3E0EC"/>
+                      </a:solidFill>
+                      <a:prstDash val="solid"/>
+                      <a:round/>
+                      <a:headEnd type="none" w="med" len="med"/>
+                      <a:tailEnd type="none" w="med" len="med"/>
+                    </a:lnR>
+                    <a:lnT w="12700" cap="flat" cmpd="sng" algn="ctr">
+                      <a:solidFill>
+                        <a:srgbClr val="E3E0EC"/>
+                      </a:solidFill>
+                      <a:prstDash val="solid"/>
+                      <a:round/>
+                      <a:headEnd type="none" w="med" len="med"/>
+                      <a:tailEnd type="none" w="med" len="med"/>
+                    </a:lnT>
+                    <a:lnB w="12700" cap="flat" cmpd="sng" algn="ctr">
+                      <a:solidFill>
+                        <a:srgbClr val="E3E0EC"/>
+                      </a:solidFill>
+                      <a:prstDash val="solid"/>
+                      <a:round/>
+                      <a:headEnd type="none" w="med" len="med"/>
+                      <a:tailEnd type="none" w="med" len="med"/>
+                    </a:lnB>
+                  </a:tcPr>
+                </a:tc>
+                <a:tc>
+                  <a:txBody>
+                    <a:bodyPr/>
+                    <a:lstStyle/>
+                    <a:p>
+                      <a:pPr indent="0" marL="0">
+                        <a:buNone/>
+                      </a:pPr>
+                      <a:r>
+                        <a:rPr lang="en-US" sz="1250" dirty="0">
+                          <a:solidFill>
+                            <a:srgbClr val="000000"/>
+                          </a:solidFill>
+                          <a:latin typeface="Calibri" pitchFamily="34" charset="0"/>
+                          <a:ea typeface="Calibri" pitchFamily="34" charset="-122"/>
+                          <a:cs typeface="Calibri" pitchFamily="34" charset="-120"/>
+                        </a:rPr>
+                        <a:t>8–20°</a:t>
+                      </a:r>
+                      <a:endParaRPr lang="en-US" sz="1250" dirty="0">
+                        <a:latin typeface="Calibri" charset="0"/>
+                        <a:ea typeface="Calibri" charset="0"/>
+                        <a:cs typeface="Calibri" charset="0"/>
+                      </a:endParaRPr>
+                    </a:p>
+                  </a:txBody>
+                  <a:tcPr marL="91440" marR="91440" marT="45720" marB="45720" anchor="ctr">
+                    <a:lnL w="12700" cap="flat" cmpd="sng" algn="ctr">
+                      <a:solidFill>
+                        <a:srgbClr val="E3E0EC"/>
+                      </a:solidFill>
+                      <a:prstDash val="solid"/>
+                      <a:round/>
+                      <a:headEnd type="none" w="med" len="med"/>
+                      <a:tailEnd type="none" w="med" len="med"/>
+                    </a:lnL>
+                    <a:lnR w="12700" cap="flat" cmpd="sng" algn="ctr">
+                      <a:solidFill>
+                        <a:srgbClr val="E3E0EC"/>
+                      </a:solidFill>
+                      <a:prstDash val="solid"/>
+                      <a:round/>
+                      <a:headEnd type="none" w="med" len="med"/>
+                      <a:tailEnd type="none" w="med" len="med"/>
+                    </a:lnR>
+                    <a:lnT w="12700" cap="flat" cmpd="sng" algn="ctr">
+                      <a:solidFill>
+                        <a:srgbClr val="E3E0EC"/>
+                      </a:solidFill>
+                      <a:prstDash val="solid"/>
+                      <a:round/>
+                      <a:headEnd type="none" w="med" len="med"/>
+                      <a:tailEnd type="none" w="med" len="med"/>
+                    </a:lnT>
+                    <a:lnB w="12700" cap="flat" cmpd="sng" algn="ctr">
+                      <a:solidFill>
+                        <a:srgbClr val="E3E0EC"/>
+                      </a:solidFill>
+                      <a:prstDash val="solid"/>
+                      <a:round/>
+                      <a:headEnd type="none" w="med" len="med"/>
+                      <a:tailEnd type="none" w="med" len="med"/>
+                    </a:lnB>
+                  </a:tcPr>
+                </a:tc>
+                <a:tc>
+                  <a:txBody>
+                    <a:bodyPr/>
+                    <a:lstStyle/>
+                    <a:p>
+                      <a:pPr indent="0" marL="0">
+                        <a:buNone/>
+                      </a:pPr>
+                      <a:r>
+                        <a:rPr lang="en-US" sz="1250" dirty="0">
+                          <a:solidFill>
+                            <a:srgbClr val="000000"/>
+                          </a:solidFill>
+                          <a:latin typeface="Calibri" pitchFamily="34" charset="0"/>
+                          <a:ea typeface="Calibri" pitchFamily="34" charset="-122"/>
+                          <a:cs typeface="Calibri" pitchFamily="34" charset="-120"/>
+                        </a:rPr>
+                        <a:t>&gt; 20°</a:t>
+                      </a:r>
+                      <a:endParaRPr lang="en-US" sz="1250" dirty="0">
+                        <a:latin typeface="Calibri" charset="0"/>
+                        <a:ea typeface="Calibri" charset="0"/>
+                        <a:cs typeface="Calibri" charset="0"/>
+                      </a:endParaRPr>
+                    </a:p>
+                  </a:txBody>
+                  <a:tcPr marL="91440" marR="91440" marT="45720" marB="45720" anchor="ctr">
+                    <a:lnL w="12700" cap="flat" cmpd="sng" algn="ctr">
+                      <a:solidFill>
+                        <a:srgbClr val="E3E0EC"/>
+                      </a:solidFill>
+                      <a:prstDash val="solid"/>
+                      <a:round/>
+                      <a:headEnd type="none" w="med" len="med"/>
+                      <a:tailEnd type="none" w="med" len="med"/>
+                    </a:lnL>
+                    <a:lnR w="12700" cap="flat" cmpd="sng" algn="ctr">
+                      <a:solidFill>
+                        <a:srgbClr val="E3E0EC"/>
+                      </a:solidFill>
+                      <a:prstDash val="solid"/>
+                      <a:round/>
+                      <a:headEnd type="none" w="med" len="med"/>
+                      <a:tailEnd type="none" w="med" len="med"/>
+                    </a:lnR>
+                    <a:lnT w="12700" cap="flat" cmpd="sng" algn="ctr">
+                      <a:solidFill>
+                        <a:srgbClr val="E3E0EC"/>
+                      </a:solidFill>
+                      <a:prstDash val="solid"/>
+                      <a:round/>
+                      <a:headEnd type="none" w="med" len="med"/>
+                      <a:tailEnd type="none" w="med" len="med"/>
+                    </a:lnT>
+                    <a:lnB w="12700" cap="flat" cmpd="sng" algn="ctr">
+                      <a:solidFill>
+                        <a:srgbClr val="E3E0EC"/>
+                      </a:solidFill>
+                      <a:prstDash val="solid"/>
+                      <a:round/>
+                      <a:headEnd type="none" w="med" len="med"/>
+                      <a:tailEnd type="none" w="med" len="med"/>
+                    </a:lnB>
+                  </a:tcPr>
+                </a:tc>
+                <a:tc>
+                  <a:txBody>
+                    <a:bodyPr/>
+                    <a:lstStyle/>
+                    <a:p>
+                      <a:pPr indent="0" marL="0">
+                        <a:buNone/>
+                      </a:pPr>
+                      <a:r>
+                        <a:rPr lang="en-US" sz="1250" dirty="0">
+                          <a:solidFill>
+                            <a:srgbClr val="000000"/>
+                          </a:solidFill>
+                          <a:latin typeface="Calibri" pitchFamily="34" charset="0"/>
+                          <a:ea typeface="Calibri" pitchFamily="34" charset="-122"/>
+                          <a:cs typeface="Calibri" pitchFamily="34" charset="-120"/>
+                        </a:rPr>
+                        <a:t>same lattice, slightly weaker bond</a:t>
+                      </a:r>
+                      <a:endParaRPr lang="en-US" sz="1250" dirty="0">
+                        <a:latin typeface="Calibri" charset="0"/>
+                        <a:ea typeface="Calibri" charset="0"/>
+                        <a:cs typeface="Calibri" charset="0"/>
+                      </a:endParaRPr>
+                    </a:p>
+                  </a:txBody>
+                  <a:tcPr marL="91440" marR="91440" marT="45720" marB="45720" anchor="ctr">
+                    <a:lnL w="12700" cap="flat" cmpd="sng" algn="ctr">
+                      <a:solidFill>
+                        <a:srgbClr val="E3E0EC"/>
+                      </a:solidFill>
+                      <a:prstDash val="solid"/>
+                      <a:round/>
+                      <a:headEnd type="none" w="med" len="med"/>
+                      <a:tailEnd type="none" w="med" len="med"/>
+                    </a:lnL>
+                    <a:lnR w="12700" cap="flat" cmpd="sng" algn="ctr">
+                      <a:solidFill>
+                        <a:srgbClr val="E3E0EC"/>
+                      </a:solidFill>
+                      <a:prstDash val="solid"/>
+                      <a:round/>
+                      <a:headEnd type="none" w="med" len="med"/>
+                      <a:tailEnd type="none" w="med" len="med"/>
+                    </a:lnR>
+                    <a:lnT w="12700" cap="flat" cmpd="sng" algn="ctr">
+                      <a:solidFill>
+                        <a:srgbClr val="E3E0EC"/>
+                      </a:solidFill>
+                      <a:prstDash val="solid"/>
+                      <a:round/>
+                      <a:headEnd type="none" w="med" len="med"/>
+                      <a:tailEnd type="none" w="med" len="med"/>
+                    </a:lnT>
+                    <a:lnB w="12700" cap="flat" cmpd="sng" algn="ctr">
+                      <a:solidFill>
+                        <a:srgbClr val="E3E0EC"/>
+                      </a:solidFill>
+                      <a:prstDash val="solid"/>
+                      <a:round/>
+                      <a:headEnd type="none" w="med" len="med"/>
+                      <a:tailEnd type="none" w="med" len="med"/>
+                    </a:lnB>
+                  </a:tcPr>
+                </a:tc>
+              </a:tr>
+              <a:tr h="411480">
+                <a:tc>
+                  <a:txBody>
+                    <a:bodyPr/>
+                    <a:lstStyle/>
+                    <a:p>
+                      <a:pPr indent="0" marL="0">
+                        <a:buNone/>
+                      </a:pPr>
+                      <a:r>
+                        <a:rPr lang="en-US" sz="1250" dirty="0">
+                          <a:solidFill>
+                            <a:srgbClr val="000000"/>
+                          </a:solidFill>
+                          <a:latin typeface="Calibri" pitchFamily="34" charset="0"/>
+                          <a:ea typeface="Calibri" pitchFamily="34" charset="-122"/>
+                          <a:cs typeface="Calibri" pitchFamily="34" charset="-120"/>
+                        </a:rPr>
+                        <a:t>Pinhead to A-tubule</a:t>
+                      </a:r>
+                      <a:endParaRPr lang="en-US" sz="1250" dirty="0">
+                        <a:latin typeface="Calibri" charset="0"/>
+                        <a:ea typeface="Calibri" charset="0"/>
+                        <a:cs typeface="Calibri" charset="0"/>
+                      </a:endParaRPr>
+                    </a:p>
+                  </a:txBody>
+                  <a:tcPr marL="91440" marR="91440" marT="45720" marB="45720" anchor="ctr">
+                    <a:lnL w="12700" cap="flat" cmpd="sng" algn="ctr">
+                      <a:solidFill>
+                        <a:srgbClr val="E3E0EC"/>
+                      </a:solidFill>
+                      <a:prstDash val="solid"/>
+                      <a:round/>
+                      <a:headEnd type="none" w="med" len="med"/>
+                      <a:tailEnd type="none" w="med" len="med"/>
+                    </a:lnL>
+                    <a:lnR w="12700" cap="flat" cmpd="sng" algn="ctr">
+                      <a:solidFill>
+                        <a:srgbClr val="E3E0EC"/>
+                      </a:solidFill>
+                      <a:prstDash val="solid"/>
+                      <a:round/>
+                      <a:headEnd type="none" w="med" len="med"/>
+                      <a:tailEnd type="none" w="med" len="med"/>
+                    </a:lnR>
+                    <a:lnT w="12700" cap="flat" cmpd="sng" algn="ctr">
+                      <a:solidFill>
+                        <a:srgbClr val="E3E0EC"/>
+                      </a:solidFill>
+                      <a:prstDash val="solid"/>
+                      <a:round/>
+                      <a:headEnd type="none" w="med" len="med"/>
+                      <a:tailEnd type="none" w="med" len="med"/>
+                    </a:lnT>
+                    <a:lnB w="12700" cap="flat" cmpd="sng" algn="ctr">
+                      <a:solidFill>
+                        <a:srgbClr val="E3E0EC"/>
+                      </a:solidFill>
+                      <a:prstDash val="solid"/>
+                      <a:round/>
+                      <a:headEnd type="none" w="med" len="med"/>
+                      <a:tailEnd type="none" w="med" len="med"/>
+                    </a:lnB>
+                  </a:tcPr>
+                </a:tc>
+                <a:tc>
+                  <a:txBody>
+                    <a:bodyPr/>
+                    <a:lstStyle/>
+                    <a:p>
+                      <a:pPr indent="0" marL="0">
+                        <a:buNone/>
+                      </a:pPr>
+                      <a:r>
+                        <a:rPr lang="en-US" sz="1250" dirty="0">
+                          <a:solidFill>
+                            <a:srgbClr val="000000"/>
+                          </a:solidFill>
+                          <a:latin typeface="Calibri" pitchFamily="34" charset="0"/>
+                          <a:ea typeface="Calibri" pitchFamily="34" charset="-122"/>
+                          <a:cs typeface="Calibri" pitchFamily="34" charset="-120"/>
+                        </a:rPr>
+                        <a:t>10°</a:t>
+                      </a:r>
+                      <a:endParaRPr lang="en-US" sz="1250" dirty="0">
+                        <a:latin typeface="Calibri" charset="0"/>
+                        <a:ea typeface="Calibri" charset="0"/>
+                        <a:cs typeface="Calibri" charset="0"/>
+                      </a:endParaRPr>
+                    </a:p>
+                  </a:txBody>
+                  <a:tcPr marL="91440" marR="91440" marT="45720" marB="45720" anchor="ctr">
+                    <a:lnL w="12700" cap="flat" cmpd="sng" algn="ctr">
+                      <a:solidFill>
+                        <a:srgbClr val="E3E0EC"/>
+                      </a:solidFill>
+                      <a:prstDash val="solid"/>
+                      <a:round/>
+                      <a:headEnd type="none" w="med" len="med"/>
+                      <a:tailEnd type="none" w="med" len="med"/>
+                    </a:lnL>
+                    <a:lnR w="12700" cap="flat" cmpd="sng" algn="ctr">
+                      <a:solidFill>
+                        <a:srgbClr val="E3E0EC"/>
+                      </a:solidFill>
+                      <a:prstDash val="solid"/>
+                      <a:round/>
+                      <a:headEnd type="none" w="med" len="med"/>
+                      <a:tailEnd type="none" w="med" len="med"/>
+                    </a:lnR>
+                    <a:lnT w="12700" cap="flat" cmpd="sng" algn="ctr">
+                      <a:solidFill>
+                        <a:srgbClr val="E3E0EC"/>
+                      </a:solidFill>
+                      <a:prstDash val="solid"/>
+                      <a:round/>
+                      <a:headEnd type="none" w="med" len="med"/>
+                      <a:tailEnd type="none" w="med" len="med"/>
+                    </a:lnT>
+                    <a:lnB w="12700" cap="flat" cmpd="sng" algn="ctr">
+                      <a:solidFill>
+                        <a:srgbClr val="E3E0EC"/>
+                      </a:solidFill>
+                      <a:prstDash val="solid"/>
+                      <a:round/>
+                      <a:headEnd type="none" w="med" len="med"/>
+                      <a:tailEnd type="none" w="med" len="med"/>
+                    </a:lnB>
+                  </a:tcPr>
+                </a:tc>
+                <a:tc>
+                  <a:txBody>
+                    <a:bodyPr/>
+                    <a:lstStyle/>
+                    <a:p>
+                      <a:pPr indent="0" marL="0">
+                        <a:buNone/>
+                      </a:pPr>
+                      <a:r>
+                        <a:rPr lang="en-US" sz="1250" dirty="0">
+                          <a:solidFill>
+                            <a:srgbClr val="000000"/>
+                          </a:solidFill>
+                          <a:latin typeface="Calibri" pitchFamily="34" charset="0"/>
+                          <a:ea typeface="Calibri" pitchFamily="34" charset="-122"/>
+                          <a:cs typeface="Calibri" pitchFamily="34" charset="-120"/>
+                        </a:rPr>
+                        <a:t>10–22°</a:t>
+                      </a:r>
+                      <a:endParaRPr lang="en-US" sz="1250" dirty="0">
+                        <a:latin typeface="Calibri" charset="0"/>
+                        <a:ea typeface="Calibri" charset="0"/>
+                        <a:cs typeface="Calibri" charset="0"/>
+                      </a:endParaRPr>
+                    </a:p>
+                  </a:txBody>
+                  <a:tcPr marL="91440" marR="91440" marT="45720" marB="45720" anchor="ctr">
+                    <a:lnL w="12700" cap="flat" cmpd="sng" algn="ctr">
+                      <a:solidFill>
+                        <a:srgbClr val="E3E0EC"/>
+                      </a:solidFill>
+                      <a:prstDash val="solid"/>
+                      <a:round/>
+                      <a:headEnd type="none" w="med" len="med"/>
+                      <a:tailEnd type="none" w="med" len="med"/>
+                    </a:lnL>
+                    <a:lnR w="12700" cap="flat" cmpd="sng" algn="ctr">
+                      <a:solidFill>
+                        <a:srgbClr val="E3E0EC"/>
+                      </a:solidFill>
+                      <a:prstDash val="solid"/>
+                      <a:round/>
+                      <a:headEnd type="none" w="med" len="med"/>
+                      <a:tailEnd type="none" w="med" len="med"/>
+                    </a:lnR>
+                    <a:lnT w="12700" cap="flat" cmpd="sng" algn="ctr">
+                      <a:solidFill>
+                        <a:srgbClr val="E3E0EC"/>
+                      </a:solidFill>
+                      <a:prstDash val="solid"/>
+                      <a:round/>
+                      <a:headEnd type="none" w="med" len="med"/>
+                      <a:tailEnd type="none" w="med" len="med"/>
+                    </a:lnT>
+                    <a:lnB w="12700" cap="flat" cmpd="sng" algn="ctr">
+                      <a:solidFill>
+                        <a:srgbClr val="E3E0EC"/>
+                      </a:solidFill>
+                      <a:prstDash val="solid"/>
+                      <a:round/>
+                      <a:headEnd type="none" w="med" len="med"/>
+                      <a:tailEnd type="none" w="med" len="med"/>
+                    </a:lnB>
+                  </a:tcPr>
+                </a:tc>
+                <a:tc>
+                  <a:txBody>
+                    <a:bodyPr/>
+                    <a:lstStyle/>
+                    <a:p>
+                      <a:pPr indent="0" marL="0">
+                        <a:buNone/>
+                      </a:pPr>
+                      <a:r>
+                        <a:rPr lang="en-US" sz="1250" dirty="0">
+                          <a:solidFill>
+                            <a:srgbClr val="000000"/>
+                          </a:solidFill>
+                          <a:latin typeface="Calibri" pitchFamily="34" charset="0"/>
+                          <a:ea typeface="Calibri" pitchFamily="34" charset="-122"/>
+                          <a:cs typeface="Calibri" pitchFamily="34" charset="-120"/>
+                        </a:rPr>
+                        <a:t>&gt; 22°</a:t>
+                      </a:r>
+                      <a:endParaRPr lang="en-US" sz="1250" dirty="0">
+                        <a:latin typeface="Calibri" charset="0"/>
+                        <a:ea typeface="Calibri" charset="0"/>
+                        <a:cs typeface="Calibri" charset="0"/>
+                      </a:endParaRPr>
+                    </a:p>
+                  </a:txBody>
+                  <a:tcPr marL="91440" marR="91440" marT="45720" marB="45720" anchor="ctr">
+                    <a:lnL w="12700" cap="flat" cmpd="sng" algn="ctr">
+                      <a:solidFill>
+                        <a:srgbClr val="E3E0EC"/>
+                      </a:solidFill>
+                      <a:prstDash val="solid"/>
+                      <a:round/>
+                      <a:headEnd type="none" w="med" len="med"/>
+                      <a:tailEnd type="none" w="med" len="med"/>
+                    </a:lnL>
+                    <a:lnR w="12700" cap="flat" cmpd="sng" algn="ctr">
+                      <a:solidFill>
+                        <a:srgbClr val="E3E0EC"/>
+                      </a:solidFill>
+                      <a:prstDash val="solid"/>
+                      <a:round/>
+                      <a:headEnd type="none" w="med" len="med"/>
+                      <a:tailEnd type="none" w="med" len="med"/>
+                    </a:lnR>
+                    <a:lnT w="12700" cap="flat" cmpd="sng" algn="ctr">
+                      <a:solidFill>
+                        <a:srgbClr val="E3E0EC"/>
+                      </a:solidFill>
+                      <a:prstDash val="solid"/>
+                      <a:round/>
+                      <a:headEnd type="none" w="med" len="med"/>
+                      <a:tailEnd type="none" w="med" len="med"/>
+                    </a:lnT>
+                    <a:lnB w="12700" cap="flat" cmpd="sng" algn="ctr">
+                      <a:solidFill>
+                        <a:srgbClr val="E3E0EC"/>
+                      </a:solidFill>
+                      <a:prstDash val="solid"/>
+                      <a:round/>
+                      <a:headEnd type="none" w="med" len="med"/>
+                      <a:tailEnd type="none" w="med" len="med"/>
+                    </a:lnB>
+                  </a:tcPr>
+                </a:tc>
+                <a:tc>
+                  <a:txBody>
+                    <a:bodyPr/>
+                    <a:lstStyle/>
+                    <a:p>
+                      <a:pPr indent="0" marL="0">
+                        <a:buNone/>
+                      </a:pPr>
+                      <a:r>
+                        <a:rPr lang="en-US" sz="1250" dirty="0">
+                          <a:solidFill>
+                            <a:srgbClr val="000000"/>
+                          </a:solidFill>
+                          <a:latin typeface="Calibri" pitchFamily="34" charset="0"/>
+                          <a:ea typeface="Calibri" pitchFamily="34" charset="-122"/>
+                          <a:cs typeface="Calibri" pitchFamily="34" charset="-120"/>
+                        </a:rPr>
+                        <a:t>lattice contact, larger footprint</a:t>
+                      </a:r>
+                      <a:endParaRPr lang="en-US" sz="1250" dirty="0">
+                        <a:latin typeface="Calibri" charset="0"/>
+                        <a:ea typeface="Calibri" charset="0"/>
+                        <a:cs typeface="Calibri" charset="0"/>
+                      </a:endParaRPr>
+                    </a:p>
+                  </a:txBody>
+                  <a:tcPr marL="91440" marR="91440" marT="45720" marB="45720" anchor="ctr">
+                    <a:lnL w="12700" cap="flat" cmpd="sng" algn="ctr">
+                      <a:solidFill>
+                        <a:srgbClr val="E3E0EC"/>
+                      </a:solidFill>
+                      <a:prstDash val="solid"/>
+                      <a:round/>
+                      <a:headEnd type="none" w="med" len="med"/>
+                      <a:tailEnd type="none" w="med" len="med"/>
+                    </a:lnL>
+                    <a:lnR w="12700" cap="flat" cmpd="sng" algn="ctr">
+                      <a:solidFill>
+                        <a:srgbClr val="E3E0EC"/>
+                      </a:solidFill>
+                      <a:prstDash val="solid"/>
+                      <a:round/>
+                      <a:headEnd type="none" w="med" len="med"/>
+                      <a:tailEnd type="none" w="med" len="med"/>
+                    </a:lnR>
+                    <a:lnT w="12700" cap="flat" cmpd="sng" algn="ctr">
+                      <a:solidFill>
+                        <a:srgbClr val="E3E0EC"/>
+                      </a:solidFill>
+                      <a:prstDash val="solid"/>
+                      <a:round/>
+                      <a:headEnd type="none" w="med" len="med"/>
+                      <a:tailEnd type="none" w="med" len="med"/>
+                    </a:lnT>
+                    <a:lnB w="12700" cap="flat" cmpd="sng" algn="ctr">
+                      <a:solidFill>
+                        <a:srgbClr val="E3E0EC"/>
+                      </a:solidFill>
+                      <a:prstDash val="solid"/>
+                      <a:round/>
+                      <a:headEnd type="none" w="med" len="med"/>
+                      <a:tailEnd type="none" w="med" len="med"/>
+                    </a:lnB>
+                  </a:tcPr>
+                </a:tc>
+              </a:tr>
+              <a:tr h="411480">
+                <a:tc>
+                  <a:txBody>
+                    <a:bodyPr/>
+                    <a:lstStyle/>
+                    <a:p>
+                      <a:pPr indent="0" marL="0">
+                        <a:buNone/>
+                      </a:pPr>
+                      <a:r>
+                        <a:rPr lang="en-US" sz="1250" dirty="0">
+                          <a:solidFill>
+                            <a:srgbClr val="000000"/>
+                          </a:solidFill>
+                          <a:latin typeface="Calibri" pitchFamily="34" charset="0"/>
+                          <a:ea typeface="Calibri" pitchFamily="34" charset="-122"/>
+                          <a:cs typeface="Calibri" pitchFamily="34" charset="-120"/>
+                        </a:rPr>
+                        <a:t>Spoke vs radial</a:t>
+                      </a:r>
+                      <a:endParaRPr lang="en-US" sz="1250" dirty="0">
+                        <a:latin typeface="Calibri" charset="0"/>
+                        <a:ea typeface="Calibri" charset="0"/>
+                        <a:cs typeface="Calibri" charset="0"/>
+                      </a:endParaRPr>
+                    </a:p>
+                  </a:txBody>
+                  <a:tcPr marL="91440" marR="91440" marT="45720" marB="45720" anchor="ctr">
+                    <a:lnL w="12700" cap="flat" cmpd="sng" algn="ctr">
+                      <a:solidFill>
+                        <a:srgbClr val="E3E0EC"/>
+                      </a:solidFill>
+                      <a:prstDash val="solid"/>
+                      <a:round/>
+                      <a:headEnd type="none" w="med" len="med"/>
+                      <a:tailEnd type="none" w="med" len="med"/>
+                    </a:lnL>
+                    <a:lnR w="12700" cap="flat" cmpd="sng" algn="ctr">
+                      <a:solidFill>
+                        <a:srgbClr val="E3E0EC"/>
+                      </a:solidFill>
+                      <a:prstDash val="solid"/>
+                      <a:round/>
+                      <a:headEnd type="none" w="med" len="med"/>
+                      <a:tailEnd type="none" w="med" len="med"/>
+                    </a:lnR>
+                    <a:lnT w="12700" cap="flat" cmpd="sng" algn="ctr">
+                      <a:solidFill>
+                        <a:srgbClr val="E3E0EC"/>
+                      </a:solidFill>
+                      <a:prstDash val="solid"/>
+                      <a:round/>
+                      <a:headEnd type="none" w="med" len="med"/>
+                      <a:tailEnd type="none" w="med" len="med"/>
+                    </a:lnT>
+                    <a:lnB w="12700" cap="flat" cmpd="sng" algn="ctr">
+                      <a:solidFill>
+                        <a:srgbClr val="E3E0EC"/>
+                      </a:solidFill>
+                      <a:prstDash val="solid"/>
+                      <a:round/>
+                      <a:headEnd type="none" w="med" len="med"/>
+                      <a:tailEnd type="none" w="med" len="med"/>
+                    </a:lnB>
+                  </a:tcPr>
+                </a:tc>
+                <a:tc>
+                  <a:txBody>
+                    <a:bodyPr/>
+                    <a:lstStyle/>
+                    <a:p>
+                      <a:pPr indent="0" marL="0">
+                        <a:buNone/>
+                      </a:pPr>
+                      <a:r>
+                        <a:rPr lang="en-US" sz="1250" dirty="0">
+                          <a:solidFill>
+                            <a:srgbClr val="000000"/>
+                          </a:solidFill>
+                          <a:latin typeface="Calibri" pitchFamily="34" charset="0"/>
+                          <a:ea typeface="Calibri" pitchFamily="34" charset="-122"/>
+                          <a:cs typeface="Calibri" pitchFamily="34" charset="-120"/>
+                        </a:rPr>
+                        <a:t>15°</a:t>
+                      </a:r>
+                      <a:endParaRPr lang="en-US" sz="1250" dirty="0">
+                        <a:latin typeface="Calibri" charset="0"/>
+                        <a:ea typeface="Calibri" charset="0"/>
+                        <a:cs typeface="Calibri" charset="0"/>
+                      </a:endParaRPr>
+                    </a:p>
+                  </a:txBody>
+                  <a:tcPr marL="91440" marR="91440" marT="45720" marB="45720" anchor="ctr">
+                    <a:lnL w="12700" cap="flat" cmpd="sng" algn="ctr">
+                      <a:solidFill>
+                        <a:srgbClr val="E3E0EC"/>
+                      </a:solidFill>
+                      <a:prstDash val="solid"/>
+                      <a:round/>
+                      <a:headEnd type="none" w="med" len="med"/>
+                      <a:tailEnd type="none" w="med" len="med"/>
+                    </a:lnL>
+                    <a:lnR w="12700" cap="flat" cmpd="sng" algn="ctr">
+                      <a:solidFill>
+                        <a:srgbClr val="E3E0EC"/>
+                      </a:solidFill>
+                      <a:prstDash val="solid"/>
+                      <a:round/>
+                      <a:headEnd type="none" w="med" len="med"/>
+                      <a:tailEnd type="none" w="med" len="med"/>
+                    </a:lnR>
+                    <a:lnT w="12700" cap="flat" cmpd="sng" algn="ctr">
+                      <a:solidFill>
+                        <a:srgbClr val="E3E0EC"/>
+                      </a:solidFill>
+                      <a:prstDash val="solid"/>
+                      <a:round/>
+                      <a:headEnd type="none" w="med" len="med"/>
+                      <a:tailEnd type="none" w="med" len="med"/>
+                    </a:lnT>
+                    <a:lnB w="12700" cap="flat" cmpd="sng" algn="ctr">
+                      <a:solidFill>
+                        <a:srgbClr val="E3E0EC"/>
+                      </a:solidFill>
+                      <a:prstDash val="solid"/>
+                      <a:round/>
+                      <a:headEnd type="none" w="med" len="med"/>
+                      <a:tailEnd type="none" w="med" len="med"/>
+                    </a:lnB>
+                  </a:tcPr>
+                </a:tc>
+                <a:tc>
+                  <a:txBody>
+                    <a:bodyPr/>
+                    <a:lstStyle/>
+                    <a:p>
+                      <a:pPr indent="0" marL="0">
+                        <a:buNone/>
+                      </a:pPr>
+                      <a:r>
+                        <a:rPr lang="en-US" sz="1250" dirty="0">
+                          <a:solidFill>
+                            <a:srgbClr val="000000"/>
+                          </a:solidFill>
+                          <a:latin typeface="Calibri" pitchFamily="34" charset="0"/>
+                          <a:ea typeface="Calibri" pitchFamily="34" charset="-122"/>
+                          <a:cs typeface="Calibri" pitchFamily="34" charset="-120"/>
+                        </a:rPr>
+                        <a:t>15–35°</a:t>
+                      </a:r>
+                      <a:endParaRPr lang="en-US" sz="1250" dirty="0">
+                        <a:latin typeface="Calibri" charset="0"/>
+                        <a:ea typeface="Calibri" charset="0"/>
+                        <a:cs typeface="Calibri" charset="0"/>
+                      </a:endParaRPr>
+                    </a:p>
+                  </a:txBody>
+                  <a:tcPr marL="91440" marR="91440" marT="45720" marB="45720" anchor="ctr">
+                    <a:lnL w="12700" cap="flat" cmpd="sng" algn="ctr">
+                      <a:solidFill>
+                        <a:srgbClr val="E3E0EC"/>
+                      </a:solidFill>
+                      <a:prstDash val="solid"/>
+                      <a:round/>
+                      <a:headEnd type="none" w="med" len="med"/>
+                      <a:tailEnd type="none" w="med" len="med"/>
+                    </a:lnL>
+                    <a:lnR w="12700" cap="flat" cmpd="sng" algn="ctr">
+                      <a:solidFill>
+                        <a:srgbClr val="E3E0EC"/>
+                      </a:solidFill>
+                      <a:prstDash val="solid"/>
+                      <a:round/>
+                      <a:headEnd type="none" w="med" len="med"/>
+                      <a:tailEnd type="none" w="med" len="med"/>
+                    </a:lnR>
+                    <a:lnT w="12700" cap="flat" cmpd="sng" algn="ctr">
+                      <a:solidFill>
+                        <a:srgbClr val="E3E0EC"/>
+                      </a:solidFill>
+                      <a:prstDash val="solid"/>
+                      <a:round/>
+                      <a:headEnd type="none" w="med" len="med"/>
+                      <a:tailEnd type="none" w="med" len="med"/>
+                    </a:lnT>
+                    <a:lnB w="12700" cap="flat" cmpd="sng" algn="ctr">
+                      <a:solidFill>
+                        <a:srgbClr val="E3E0EC"/>
+                      </a:solidFill>
+                      <a:prstDash val="solid"/>
+                      <a:round/>
+                      <a:headEnd type="none" w="med" len="med"/>
+                      <a:tailEnd type="none" w="med" len="med"/>
+                    </a:lnB>
+                  </a:tcPr>
+                </a:tc>
+                <a:tc>
+                  <a:txBody>
+                    <a:bodyPr/>
+                    <a:lstStyle/>
+                    <a:p>
+                      <a:pPr indent="0" marL="0">
+                        <a:buNone/>
+                      </a:pPr>
+                      <a:r>
+                        <a:rPr lang="en-US" sz="1250" dirty="0">
+                          <a:solidFill>
+                            <a:srgbClr val="000000"/>
+                          </a:solidFill>
+                          <a:latin typeface="Calibri" pitchFamily="34" charset="0"/>
+                          <a:ea typeface="Calibri" pitchFamily="34" charset="-122"/>
+                          <a:cs typeface="Calibri" pitchFamily="34" charset="-120"/>
+                        </a:rPr>
+                        <a:t>&gt; 35°</a:t>
+                      </a:r>
+                      <a:endParaRPr lang="en-US" sz="1250" dirty="0">
+                        <a:latin typeface="Calibri" charset="0"/>
+                        <a:ea typeface="Calibri" charset="0"/>
+                        <a:cs typeface="Calibri" charset="0"/>
+                      </a:endParaRPr>
+                    </a:p>
+                  </a:txBody>
+                  <a:tcPr marL="91440" marR="91440" marT="45720" marB="45720" anchor="ctr">
+                    <a:lnL w="12700" cap="flat" cmpd="sng" algn="ctr">
+                      <a:solidFill>
+                        <a:srgbClr val="E3E0EC"/>
+                      </a:solidFill>
+                      <a:prstDash val="solid"/>
+                      <a:round/>
+                      <a:headEnd type="none" w="med" len="med"/>
+                      <a:tailEnd type="none" w="med" len="med"/>
+                    </a:lnL>
+                    <a:lnR w="12700" cap="flat" cmpd="sng" algn="ctr">
+                      <a:solidFill>
+                        <a:srgbClr val="E3E0EC"/>
+                      </a:solidFill>
+                      <a:prstDash val="solid"/>
+                      <a:round/>
+                      <a:headEnd type="none" w="med" len="med"/>
+                      <a:tailEnd type="none" w="med" len="med"/>
+                    </a:lnR>
+                    <a:lnT w="12700" cap="flat" cmpd="sng" algn="ctr">
+                      <a:solidFill>
+                        <a:srgbClr val="E3E0EC"/>
+                      </a:solidFill>
+                      <a:prstDash val="solid"/>
+                      <a:round/>
+                      <a:headEnd type="none" w="med" len="med"/>
+                      <a:tailEnd type="none" w="med" len="med"/>
+                    </a:lnT>
+                    <a:lnB w="12700" cap="flat" cmpd="sng" algn="ctr">
+                      <a:solidFill>
+                        <a:srgbClr val="E3E0EC"/>
+                      </a:solidFill>
+                      <a:prstDash val="solid"/>
+                      <a:round/>
+                      <a:headEnd type="none" w="med" len="med"/>
+                      <a:tailEnd type="none" w="med" len="med"/>
+                    </a:lnB>
+                  </a:tcPr>
+                </a:tc>
+                <a:tc>
+                  <a:txBody>
+                    <a:bodyPr/>
+                    <a:lstStyle/>
+                    <a:p>
+                      <a:pPr indent="0" marL="0">
+                        <a:buNone/>
+                      </a:pPr>
+                      <a:r>
+                        <a:rPr lang="en-US" sz="1250" dirty="0">
+                          <a:solidFill>
+                            <a:srgbClr val="000000"/>
+                          </a:solidFill>
+                          <a:latin typeface="Calibri" pitchFamily="34" charset="0"/>
+                          <a:ea typeface="Calibri" pitchFamily="34" charset="-122"/>
+                          <a:cs typeface="Calibri" pitchFamily="34" charset="-120"/>
+                        </a:rPr>
+                        <a:t>many SAS-6 rings stack axially</a:t>
+                      </a:r>
+                      <a:endParaRPr lang="en-US" sz="1250" dirty="0">
+                        <a:latin typeface="Calibri" charset="0"/>
+                        <a:ea typeface="Calibri" charset="0"/>
+                        <a:cs typeface="Calibri" charset="0"/>
+                      </a:endParaRPr>
+                    </a:p>
+                  </a:txBody>
+                  <a:tcPr marL="91440" marR="91440" marT="45720" marB="45720" anchor="ctr">
+                    <a:lnL w="12700" cap="flat" cmpd="sng" algn="ctr">
+                      <a:solidFill>
+                        <a:srgbClr val="E3E0EC"/>
+                      </a:solidFill>
+                      <a:prstDash val="solid"/>
+                      <a:round/>
+                      <a:headEnd type="none" w="med" len="med"/>
+                      <a:tailEnd type="none" w="med" len="med"/>
+                    </a:lnL>
+                    <a:lnR w="12700" cap="flat" cmpd="sng" algn="ctr">
+                      <a:solidFill>
+                        <a:srgbClr val="E3E0EC"/>
+                      </a:solidFill>
+                      <a:prstDash val="solid"/>
+                      <a:round/>
+                      <a:headEnd type="none" w="med" len="med"/>
+                      <a:tailEnd type="none" w="med" len="med"/>
+                    </a:lnR>
+                    <a:lnT w="12700" cap="flat" cmpd="sng" algn="ctr">
+                      <a:solidFill>
+                        <a:srgbClr val="E3E0EC"/>
+                      </a:solidFill>
+                      <a:prstDash val="solid"/>
+                      <a:round/>
+                      <a:headEnd type="none" w="med" len="med"/>
+                      <a:tailEnd type="none" w="med" len="med"/>
+                    </a:lnT>
+                    <a:lnB w="12700" cap="flat" cmpd="sng" algn="ctr">
+                      <a:solidFill>
+                        <a:srgbClr val="E3E0EC"/>
+                      </a:solidFill>
+                      <a:prstDash val="solid"/>
+                      <a:round/>
+                      <a:headEnd type="none" w="med" len="med"/>
+                      <a:tailEnd type="none" w="med" len="med"/>
+                    </a:lnB>
+                  </a:tcPr>
+                </a:tc>
+              </a:tr>
+              <a:tr h="411480">
+                <a:tc>
+                  <a:txBody>
+                    <a:bodyPr/>
+                    <a:lstStyle/>
+                    <a:p>
+                      <a:pPr indent="0" marL="0">
+                        <a:buNone/>
+                      </a:pPr>
+                      <a:r>
+                        <a:rPr lang="en-US" sz="1250" dirty="0">
+                          <a:solidFill>
+                            <a:srgbClr val="000000"/>
+                          </a:solidFill>
+                          <a:latin typeface="Calibri" pitchFamily="34" charset="0"/>
+                          <a:ea typeface="Calibri" pitchFamily="34" charset="-122"/>
+                          <a:cs typeface="Calibri" pitchFamily="34" charset="-120"/>
+                        </a:rPr>
+                        <a:t>Pinhead vs spoke</a:t>
+                      </a:r>
+                      <a:endParaRPr lang="en-US" sz="1250" dirty="0">
+                        <a:latin typeface="Calibri" charset="0"/>
+                        <a:ea typeface="Calibri" charset="0"/>
+                        <a:cs typeface="Calibri" charset="0"/>
+                      </a:endParaRPr>
+                    </a:p>
+                  </a:txBody>
+                  <a:tcPr marL="91440" marR="91440" marT="45720" marB="45720" anchor="ctr">
+                    <a:lnL w="12700" cap="flat" cmpd="sng" algn="ctr">
+                      <a:solidFill>
+                        <a:srgbClr val="E3E0EC"/>
+                      </a:solidFill>
+                      <a:prstDash val="solid"/>
+                      <a:round/>
+                      <a:headEnd type="none" w="med" len="med"/>
+                      <a:tailEnd type="none" w="med" len="med"/>
+                    </a:lnL>
+                    <a:lnR w="12700" cap="flat" cmpd="sng" algn="ctr">
+                      <a:solidFill>
+                        <a:srgbClr val="E3E0EC"/>
+                      </a:solidFill>
+                      <a:prstDash val="solid"/>
+                      <a:round/>
+                      <a:headEnd type="none" w="med" len="med"/>
+                      <a:tailEnd type="none" w="med" len="med"/>
+                    </a:lnR>
+                    <a:lnT w="12700" cap="flat" cmpd="sng" algn="ctr">
+                      <a:solidFill>
+                        <a:srgbClr val="E3E0EC"/>
+                      </a:solidFill>
+                      <a:prstDash val="solid"/>
+                      <a:round/>
+                      <a:headEnd type="none" w="med" len="med"/>
+                      <a:tailEnd type="none" w="med" len="med"/>
+                    </a:lnT>
+                    <a:lnB w="12700" cap="flat" cmpd="sng" algn="ctr">
+                      <a:solidFill>
+                        <a:srgbClr val="E3E0EC"/>
+                      </a:solidFill>
+                      <a:prstDash val="solid"/>
+                      <a:round/>
+                      <a:headEnd type="none" w="med" len="med"/>
+                      <a:tailEnd type="none" w="med" len="med"/>
+                    </a:lnB>
+                  </a:tcPr>
+                </a:tc>
+                <a:tc>
+                  <a:txBody>
+                    <a:bodyPr/>
+                    <a:lstStyle/>
+                    <a:p>
+                      <a:pPr indent="0" marL="0">
+                        <a:buNone/>
+                      </a:pPr>
+                      <a:r>
+                        <a:rPr lang="en-US" sz="1250" dirty="0">
+                          <a:solidFill>
+                            <a:srgbClr val="000000"/>
+                          </a:solidFill>
+                          <a:latin typeface="Calibri" pitchFamily="34" charset="0"/>
+                          <a:ea typeface="Calibri" pitchFamily="34" charset="-122"/>
+                          <a:cs typeface="Calibri" pitchFamily="34" charset="-120"/>
+                        </a:rPr>
+                        <a:t>15°</a:t>
+                      </a:r>
+                      <a:endParaRPr lang="en-US" sz="1250" dirty="0">
+                        <a:latin typeface="Calibri" charset="0"/>
+                        <a:ea typeface="Calibri" charset="0"/>
+                        <a:cs typeface="Calibri" charset="0"/>
+                      </a:endParaRPr>
+                    </a:p>
+                  </a:txBody>
+                  <a:tcPr marL="91440" marR="91440" marT="45720" marB="45720" anchor="ctr">
+                    <a:lnL w="12700" cap="flat" cmpd="sng" algn="ctr">
+                      <a:solidFill>
+                        <a:srgbClr val="E3E0EC"/>
+                      </a:solidFill>
+                      <a:prstDash val="solid"/>
+                      <a:round/>
+                      <a:headEnd type="none" w="med" len="med"/>
+                      <a:tailEnd type="none" w="med" len="med"/>
+                    </a:lnL>
+                    <a:lnR w="12700" cap="flat" cmpd="sng" algn="ctr">
+                      <a:solidFill>
+                        <a:srgbClr val="E3E0EC"/>
+                      </a:solidFill>
+                      <a:prstDash val="solid"/>
+                      <a:round/>
+                      <a:headEnd type="none" w="med" len="med"/>
+                      <a:tailEnd type="none" w="med" len="med"/>
+                    </a:lnR>
+                    <a:lnT w="12700" cap="flat" cmpd="sng" algn="ctr">
+                      <a:solidFill>
+                        <a:srgbClr val="E3E0EC"/>
+                      </a:solidFill>
+                      <a:prstDash val="solid"/>
+                      <a:round/>
+                      <a:headEnd type="none" w="med" len="med"/>
+                      <a:tailEnd type="none" w="med" len="med"/>
+                    </a:lnT>
+                    <a:lnB w="12700" cap="flat" cmpd="sng" algn="ctr">
+                      <a:solidFill>
+                        <a:srgbClr val="E3E0EC"/>
+                      </a:solidFill>
+                      <a:prstDash val="solid"/>
+                      <a:round/>
+                      <a:headEnd type="none" w="med" len="med"/>
+                      <a:tailEnd type="none" w="med" len="med"/>
+                    </a:lnB>
+                  </a:tcPr>
+                </a:tc>
+                <a:tc>
+                  <a:txBody>
+                    <a:bodyPr/>
+                    <a:lstStyle/>
+                    <a:p>
+                      <a:pPr indent="0" marL="0">
+                        <a:buNone/>
+                      </a:pPr>
+                      <a:r>
+                        <a:rPr lang="en-US" sz="1250" dirty="0">
+                          <a:solidFill>
+                            <a:srgbClr val="000000"/>
+                          </a:solidFill>
+                          <a:latin typeface="Calibri" pitchFamily="34" charset="0"/>
+                          <a:ea typeface="Calibri" pitchFamily="34" charset="-122"/>
+                          <a:cs typeface="Calibri" pitchFamily="34" charset="-120"/>
+                        </a:rPr>
+                        <a:t>15–30°</a:t>
+                      </a:r>
+                      <a:endParaRPr lang="en-US" sz="1250" dirty="0">
+                        <a:latin typeface="Calibri" charset="0"/>
+                        <a:ea typeface="Calibri" charset="0"/>
+                        <a:cs typeface="Calibri" charset="0"/>
+                      </a:endParaRPr>
+                    </a:p>
+                  </a:txBody>
+                  <a:tcPr marL="91440" marR="91440" marT="45720" marB="45720" anchor="ctr">
+                    <a:lnL w="12700" cap="flat" cmpd="sng" algn="ctr">
+                      <a:solidFill>
+                        <a:srgbClr val="E3E0EC"/>
+                      </a:solidFill>
+                      <a:prstDash val="solid"/>
+                      <a:round/>
+                      <a:headEnd type="none" w="med" len="med"/>
+                      <a:tailEnd type="none" w="med" len="med"/>
+                    </a:lnL>
+                    <a:lnR w="12700" cap="flat" cmpd="sng" algn="ctr">
+                      <a:solidFill>
+                        <a:srgbClr val="E3E0EC"/>
+                      </a:solidFill>
+                      <a:prstDash val="solid"/>
+                      <a:round/>
+                      <a:headEnd type="none" w="med" len="med"/>
+                      <a:tailEnd type="none" w="med" len="med"/>
+                    </a:lnR>
+                    <a:lnT w="12700" cap="flat" cmpd="sng" algn="ctr">
+                      <a:solidFill>
+                        <a:srgbClr val="E3E0EC"/>
+                      </a:solidFill>
+                      <a:prstDash val="solid"/>
+                      <a:round/>
+                      <a:headEnd type="none" w="med" len="med"/>
+                      <a:tailEnd type="none" w="med" len="med"/>
+                    </a:lnT>
+                    <a:lnB w="12700" cap="flat" cmpd="sng" algn="ctr">
+                      <a:solidFill>
+                        <a:srgbClr val="E3E0EC"/>
+                      </a:solidFill>
+                      <a:prstDash val="solid"/>
+                      <a:round/>
+                      <a:headEnd type="none" w="med" len="med"/>
+                      <a:tailEnd type="none" w="med" len="med"/>
+                    </a:lnB>
+                  </a:tcPr>
+                </a:tc>
+                <a:tc>
+                  <a:txBody>
+                    <a:bodyPr/>
+                    <a:lstStyle/>
+                    <a:p>
+                      <a:pPr indent="0" marL="0">
+                        <a:buNone/>
+                      </a:pPr>
+                      <a:r>
+                        <a:rPr lang="en-US" sz="1250" dirty="0">
+                          <a:solidFill>
+                            <a:srgbClr val="000000"/>
+                          </a:solidFill>
+                          <a:latin typeface="Calibri" pitchFamily="34" charset="0"/>
+                          <a:ea typeface="Calibri" pitchFamily="34" charset="-122"/>
+                          <a:cs typeface="Calibri" pitchFamily="34" charset="-120"/>
+                        </a:rPr>
+                        <a:t>&gt; 30°</a:t>
+                      </a:r>
+                      <a:endParaRPr lang="en-US" sz="1250" dirty="0">
+                        <a:latin typeface="Calibri" charset="0"/>
+                        <a:ea typeface="Calibri" charset="0"/>
+                        <a:cs typeface="Calibri" charset="0"/>
+                      </a:endParaRPr>
+                    </a:p>
+                  </a:txBody>
+                  <a:tcPr marL="91440" marR="91440" marT="45720" marB="45720" anchor="ctr">
+                    <a:lnL w="12700" cap="flat" cmpd="sng" algn="ctr">
+                      <a:solidFill>
+                        <a:srgbClr val="E3E0EC"/>
+                      </a:solidFill>
+                      <a:prstDash val="solid"/>
+                      <a:round/>
+                      <a:headEnd type="none" w="med" len="med"/>
+                      <a:tailEnd type="none" w="med" len="med"/>
+                    </a:lnL>
+                    <a:lnR w="12700" cap="flat" cmpd="sng" algn="ctr">
+                      <a:solidFill>
+                        <a:srgbClr val="E3E0EC"/>
+                      </a:solidFill>
+                      <a:prstDash val="solid"/>
+                      <a:round/>
+                      <a:headEnd type="none" w="med" len="med"/>
+                      <a:tailEnd type="none" w="med" len="med"/>
+                    </a:lnR>
+                    <a:lnT w="12700" cap="flat" cmpd="sng" algn="ctr">
+                      <a:solidFill>
+                        <a:srgbClr val="E3E0EC"/>
+                      </a:solidFill>
+                      <a:prstDash val="solid"/>
+                      <a:round/>
+                      <a:headEnd type="none" w="med" len="med"/>
+                      <a:tailEnd type="none" w="med" len="med"/>
+                    </a:lnT>
+                    <a:lnB w="12700" cap="flat" cmpd="sng" algn="ctr">
+                      <a:solidFill>
+                        <a:srgbClr val="E3E0EC"/>
+                      </a:solidFill>
+                      <a:prstDash val="solid"/>
+                      <a:round/>
+                      <a:headEnd type="none" w="med" len="med"/>
+                      <a:tailEnd type="none" w="med" len="med"/>
+                    </a:lnB>
+                  </a:tcPr>
+                </a:tc>
+                <a:tc>
+                  <a:txBody>
+                    <a:bodyPr/>
+                    <a:lstStyle/>
+                    <a:p>
+                      <a:pPr indent="0" marL="0">
+                        <a:buNone/>
+                      </a:pPr>
+                      <a:r>
+                        <a:rPr lang="en-US" sz="1250" dirty="0">
+                          <a:solidFill>
+                            <a:srgbClr val="000000"/>
+                          </a:solidFill>
+                          <a:latin typeface="Calibri" pitchFamily="34" charset="0"/>
+                          <a:ea typeface="Calibri" pitchFamily="34" charset="-122"/>
+                          <a:cs typeface="Calibri" pitchFamily="34" charset="-120"/>
+                        </a:rPr>
+                        <a:t>multi-protein, three contacts</a:t>
+                      </a:r>
+                      <a:endParaRPr lang="en-US" sz="1250" dirty="0">
+                        <a:latin typeface="Calibri" charset="0"/>
+                        <a:ea typeface="Calibri" charset="0"/>
+                        <a:cs typeface="Calibri" charset="0"/>
+                      </a:endParaRPr>
+                    </a:p>
+                  </a:txBody>
+                  <a:tcPr marL="91440" marR="91440" marT="45720" marB="45720" anchor="ctr">
+                    <a:lnL w="12700" cap="flat" cmpd="sng" algn="ctr">
+                      <a:solidFill>
+                        <a:srgbClr val="E3E0EC"/>
+                      </a:solidFill>
+                      <a:prstDash val="solid"/>
+                      <a:round/>
+                      <a:headEnd type="none" w="med" len="med"/>
+                      <a:tailEnd type="none" w="med" len="med"/>
+                    </a:lnL>
+                    <a:lnR w="12700" cap="flat" cmpd="sng" algn="ctr">
+                      <a:solidFill>
+                        <a:srgbClr val="E3E0EC"/>
+                      </a:solidFill>
+                      <a:prstDash val="solid"/>
+                      <a:round/>
+                      <a:headEnd type="none" w="med" len="med"/>
+                      <a:tailEnd type="none" w="med" len="med"/>
+                    </a:lnR>
+                    <a:lnT w="12700" cap="flat" cmpd="sng" algn="ctr">
+                      <a:solidFill>
+                        <a:srgbClr val="E3E0EC"/>
+                      </a:solidFill>
+                      <a:prstDash val="solid"/>
+                      <a:round/>
+                      <a:headEnd type="none" w="med" len="med"/>
+                      <a:tailEnd type="none" w="med" len="med"/>
+                    </a:lnT>
+                    <a:lnB w="12700" cap="flat" cmpd="sng" algn="ctr">
+                      <a:solidFill>
+                        <a:srgbClr val="E3E0EC"/>
+                      </a:solidFill>
+                      <a:prstDash val="solid"/>
+                      <a:round/>
+                      <a:headEnd type="none" w="med" len="med"/>
+                      <a:tailEnd type="none" w="med" len="med"/>
+                    </a:lnB>
+                  </a:tcPr>
+                </a:tc>
+              </a:tr>
+              <a:tr h="411480">
+                <a:tc>
+                  <a:txBody>
+                    <a:bodyPr/>
+                    <a:lstStyle/>
+                    <a:p>
+                      <a:pPr indent="0" marL="0">
+                        <a:buNone/>
+                      </a:pPr>
+                      <a:r>
+                        <a:rPr lang="en-US" sz="1250" dirty="0">
+                          <a:solidFill>
+                            <a:srgbClr val="000000"/>
+                          </a:solidFill>
+                          <a:latin typeface="Calibri" pitchFamily="34" charset="0"/>
+                          <a:ea typeface="Calibri" pitchFamily="34" charset="-122"/>
+                          <a:cs typeface="Calibri" pitchFamily="34" charset="-120"/>
+                        </a:rPr>
+                        <a:t>Triplet axis vs spoke</a:t>
+                      </a:r>
+                      <a:endParaRPr lang="en-US" sz="1250" dirty="0">
+                        <a:latin typeface="Calibri" charset="0"/>
+                        <a:ea typeface="Calibri" charset="0"/>
+                        <a:cs typeface="Calibri" charset="0"/>
+                      </a:endParaRPr>
+                    </a:p>
+                  </a:txBody>
+                  <a:tcPr marL="91440" marR="91440" marT="45720" marB="45720" anchor="ctr">
+                    <a:lnL w="12700" cap="flat" cmpd="sng" algn="ctr">
+                      <a:solidFill>
+                        <a:srgbClr val="E3E0EC"/>
+                      </a:solidFill>
+                      <a:prstDash val="solid"/>
+                      <a:round/>
+                      <a:headEnd type="none" w="med" len="med"/>
+                      <a:tailEnd type="none" w="med" len="med"/>
+                    </a:lnL>
+                    <a:lnR w="12700" cap="flat" cmpd="sng" algn="ctr">
+                      <a:solidFill>
+                        <a:srgbClr val="E3E0EC"/>
+                      </a:solidFill>
+                      <a:prstDash val="solid"/>
+                      <a:round/>
+                      <a:headEnd type="none" w="med" len="med"/>
+                      <a:tailEnd type="none" w="med" len="med"/>
+                    </a:lnR>
+                    <a:lnT w="12700" cap="flat" cmpd="sng" algn="ctr">
+                      <a:solidFill>
+                        <a:srgbClr val="E3E0EC"/>
+                      </a:solidFill>
+                      <a:prstDash val="solid"/>
+                      <a:round/>
+                      <a:headEnd type="none" w="med" len="med"/>
+                      <a:tailEnd type="none" w="med" len="med"/>
+                    </a:lnT>
+                    <a:lnB w="12700" cap="flat" cmpd="sng" algn="ctr">
+                      <a:solidFill>
+                        <a:srgbClr val="E3E0EC"/>
+                      </a:solidFill>
+                      <a:prstDash val="solid"/>
+                      <a:round/>
+                      <a:headEnd type="none" w="med" len="med"/>
+                      <a:tailEnd type="none" w="med" len="med"/>
+                    </a:lnB>
+                  </a:tcPr>
+                </a:tc>
+                <a:tc>
+                  <a:txBody>
+                    <a:bodyPr/>
+                    <a:lstStyle/>
+                    <a:p>
+                      <a:pPr indent="0" marL="0">
+                        <a:buNone/>
+                      </a:pPr>
+                      <a:r>
+                        <a:rPr lang="en-US" sz="1250" dirty="0">
+                          <a:solidFill>
+                            <a:srgbClr val="000000"/>
+                          </a:solidFill>
+                          <a:latin typeface="Calibri" pitchFamily="34" charset="0"/>
+                          <a:ea typeface="Calibri" pitchFamily="34" charset="-122"/>
+                          <a:cs typeface="Calibri" pitchFamily="34" charset="-120"/>
+                        </a:rPr>
+                        <a:t>20°</a:t>
+                      </a:r>
+                      <a:endParaRPr lang="en-US" sz="1250" dirty="0">
+                        <a:latin typeface="Calibri" charset="0"/>
+                        <a:ea typeface="Calibri" charset="0"/>
+                        <a:cs typeface="Calibri" charset="0"/>
+                      </a:endParaRPr>
+                    </a:p>
+                  </a:txBody>
+                  <a:tcPr marL="91440" marR="91440" marT="45720" marB="45720" anchor="ctr">
+                    <a:lnL w="12700" cap="flat" cmpd="sng" algn="ctr">
+                      <a:solidFill>
+                        <a:srgbClr val="E3E0EC"/>
+                      </a:solidFill>
+                      <a:prstDash val="solid"/>
+                      <a:round/>
+                      <a:headEnd type="none" w="med" len="med"/>
+                      <a:tailEnd type="none" w="med" len="med"/>
+                    </a:lnL>
+                    <a:lnR w="12700" cap="flat" cmpd="sng" algn="ctr">
+                      <a:solidFill>
+                        <a:srgbClr val="E3E0EC"/>
+                      </a:solidFill>
+                      <a:prstDash val="solid"/>
+                      <a:round/>
+                      <a:headEnd type="none" w="med" len="med"/>
+                      <a:tailEnd type="none" w="med" len="med"/>
+                    </a:lnR>
+                    <a:lnT w="12700" cap="flat" cmpd="sng" algn="ctr">
+                      <a:solidFill>
+                        <a:srgbClr val="E3E0EC"/>
+                      </a:solidFill>
+                      <a:prstDash val="solid"/>
+                      <a:round/>
+                      <a:headEnd type="none" w="med" len="med"/>
+                      <a:tailEnd type="none" w="med" len="med"/>
+                    </a:lnT>
+                    <a:lnB w="12700" cap="flat" cmpd="sng" algn="ctr">
+                      <a:solidFill>
+                        <a:srgbClr val="E3E0EC"/>
+                      </a:solidFill>
+                      <a:prstDash val="solid"/>
+                      <a:round/>
+                      <a:headEnd type="none" w="med" len="med"/>
+                      <a:tailEnd type="none" w="med" len="med"/>
+                    </a:lnB>
+                  </a:tcPr>
+                </a:tc>
+                <a:tc>
+                  <a:txBody>
+                    <a:bodyPr/>
+                    <a:lstStyle/>
+                    <a:p>
+                      <a:pPr indent="0" marL="0">
+                        <a:buNone/>
+                      </a:pPr>
+                      <a:r>
+                        <a:rPr lang="en-US" sz="1250" dirty="0">
+                          <a:solidFill>
+                            <a:srgbClr val="000000"/>
+                          </a:solidFill>
+                          <a:latin typeface="Calibri" pitchFamily="34" charset="0"/>
+                          <a:ea typeface="Calibri" pitchFamily="34" charset="-122"/>
+                          <a:cs typeface="Calibri" pitchFamily="34" charset="-120"/>
+                        </a:rPr>
+                        <a:t>20–40°</a:t>
+                      </a:r>
+                      <a:endParaRPr lang="en-US" sz="1250" dirty="0">
+                        <a:latin typeface="Calibri" charset="0"/>
+                        <a:ea typeface="Calibri" charset="0"/>
+                        <a:cs typeface="Calibri" charset="0"/>
+                      </a:endParaRPr>
+                    </a:p>
+                  </a:txBody>
+                  <a:tcPr marL="91440" marR="91440" marT="45720" marB="45720" anchor="ctr">
+                    <a:lnL w="12700" cap="flat" cmpd="sng" algn="ctr">
+                      <a:solidFill>
+                        <a:srgbClr val="E3E0EC"/>
+                      </a:solidFill>
+                      <a:prstDash val="solid"/>
+                      <a:round/>
+                      <a:headEnd type="none" w="med" len="med"/>
+                      <a:tailEnd type="none" w="med" len="med"/>
+                    </a:lnL>
+                    <a:lnR w="12700" cap="flat" cmpd="sng" algn="ctr">
+                      <a:solidFill>
+                        <a:srgbClr val="E3E0EC"/>
+                      </a:solidFill>
+                      <a:prstDash val="solid"/>
+                      <a:round/>
+                      <a:headEnd type="none" w="med" len="med"/>
+                      <a:tailEnd type="none" w="med" len="med"/>
+                    </a:lnR>
+                    <a:lnT w="12700" cap="flat" cmpd="sng" algn="ctr">
+                      <a:solidFill>
+                        <a:srgbClr val="E3E0EC"/>
+                      </a:solidFill>
+                      <a:prstDash val="solid"/>
+                      <a:round/>
+                      <a:headEnd type="none" w="med" len="med"/>
+                      <a:tailEnd type="none" w="med" len="med"/>
+                    </a:lnT>
+                    <a:lnB w="12700" cap="flat" cmpd="sng" algn="ctr">
+                      <a:solidFill>
+                        <a:srgbClr val="E3E0EC"/>
+                      </a:solidFill>
+                      <a:prstDash val="solid"/>
+                      <a:round/>
+                      <a:headEnd type="none" w="med" len="med"/>
+                      <a:tailEnd type="none" w="med" len="med"/>
+                    </a:lnB>
+                  </a:tcPr>
+                </a:tc>
+                <a:tc>
+                  <a:txBody>
+                    <a:bodyPr/>
+                    <a:lstStyle/>
+                    <a:p>
+                      <a:pPr indent="0" marL="0">
+                        <a:buNone/>
+                      </a:pPr>
+                      <a:r>
+                        <a:rPr lang="en-US" sz="1250" dirty="0">
+                          <a:solidFill>
+                            <a:srgbClr val="000000"/>
+                          </a:solidFill>
+                          <a:latin typeface="Calibri" pitchFamily="34" charset="0"/>
+                          <a:ea typeface="Calibri" pitchFamily="34" charset="-122"/>
+                          <a:cs typeface="Calibri" pitchFamily="34" charset="-120"/>
+                        </a:rPr>
+                        <a:t>&gt; 40°</a:t>
+                      </a:r>
+                      <a:endParaRPr lang="en-US" sz="1250" dirty="0">
+                        <a:latin typeface="Calibri" charset="0"/>
+                        <a:ea typeface="Calibri" charset="0"/>
+                        <a:cs typeface="Calibri" charset="0"/>
+                      </a:endParaRPr>
+                    </a:p>
+                  </a:txBody>
+                  <a:tcPr marL="91440" marR="91440" marT="45720" marB="45720" anchor="ctr">
+                    <a:lnL w="12700" cap="flat" cmpd="sng" algn="ctr">
+                      <a:solidFill>
+                        <a:srgbClr val="E3E0EC"/>
+                      </a:solidFill>
+                      <a:prstDash val="solid"/>
+                      <a:round/>
+                      <a:headEnd type="none" w="med" len="med"/>
+                      <a:tailEnd type="none" w="med" len="med"/>
+                    </a:lnL>
+                    <a:lnR w="12700" cap="flat" cmpd="sng" algn="ctr">
+                      <a:solidFill>
+                        <a:srgbClr val="E3E0EC"/>
+                      </a:solidFill>
+                      <a:prstDash val="solid"/>
+                      <a:round/>
+                      <a:headEnd type="none" w="med" len="med"/>
+                      <a:tailEnd type="none" w="med" len="med"/>
+                    </a:lnR>
+                    <a:lnT w="12700" cap="flat" cmpd="sng" algn="ctr">
+                      <a:solidFill>
+                        <a:srgbClr val="E3E0EC"/>
+                      </a:solidFill>
+                      <a:prstDash val="solid"/>
+                      <a:round/>
+                      <a:headEnd type="none" w="med" len="med"/>
+                      <a:tailEnd type="none" w="med" len="med"/>
+                    </a:lnT>
+                    <a:lnB w="12700" cap="flat" cmpd="sng" algn="ctr">
+                      <a:solidFill>
+                        <a:srgbClr val="E3E0EC"/>
+                      </a:solidFill>
+                      <a:prstDash val="solid"/>
+                      <a:round/>
+                      <a:headEnd type="none" w="med" len="med"/>
+                      <a:tailEnd type="none" w="med" len="med"/>
+                    </a:lnB>
+                  </a:tcPr>
+                </a:tc>
+                <a:tc>
+                  <a:txBody>
+                    <a:bodyPr/>
+                    <a:lstStyle/>
+                    <a:p>
+                      <a:pPr indent="0" marL="0">
+                        <a:buNone/>
+                      </a:pPr>
+                      <a:r>
+                        <a:rPr lang="en-US" sz="1250" dirty="0">
+                          <a:solidFill>
+                            <a:srgbClr val="000000"/>
+                          </a:solidFill>
+                          <a:latin typeface="Calibri" pitchFamily="34" charset="0"/>
+                          <a:ea typeface="Calibri" pitchFamily="34" charset="-122"/>
+                          <a:cs typeface="Calibri" pitchFamily="34" charset="-120"/>
+                        </a:rPr>
+                        <a:t>a composite, not one interface</a:t>
+                      </a:r>
+                      <a:endParaRPr lang="en-US" sz="1250" dirty="0">
+                        <a:latin typeface="Calibri" charset="0"/>
+                        <a:ea typeface="Calibri" charset="0"/>
+                        <a:cs typeface="Calibri" charset="0"/>
+                      </a:endParaRPr>
+                    </a:p>
+                  </a:txBody>
+                  <a:tcPr marL="91440" marR="91440" marT="45720" marB="45720" anchor="ctr">
+                    <a:lnL w="12700" cap="flat" cmpd="sng" algn="ctr">
+                      <a:solidFill>
+                        <a:srgbClr val="E3E0EC"/>
+                      </a:solidFill>
+                      <a:prstDash val="solid"/>
+                      <a:round/>
+                      <a:headEnd type="none" w="med" len="med"/>
+                      <a:tailEnd type="none" w="med" len="med"/>
+                    </a:lnL>
+                    <a:lnR w="12700" cap="flat" cmpd="sng" algn="ctr">
+                      <a:solidFill>
+                        <a:srgbClr val="E3E0EC"/>
+                      </a:solidFill>
+                      <a:prstDash val="solid"/>
+                      <a:round/>
+                      <a:headEnd type="none" w="med" len="med"/>
+                      <a:tailEnd type="none" w="med" len="med"/>
+                    </a:lnR>
+                    <a:lnT w="12700" cap="flat" cmpd="sng" algn="ctr">
+                      <a:solidFill>
+                        <a:srgbClr val="E3E0EC"/>
+                      </a:solidFill>
+                      <a:prstDash val="solid"/>
+                      <a:round/>
+                      <a:headEnd type="none" w="med" len="med"/>
+                      <a:tailEnd type="none" w="med" len="med"/>
+                    </a:lnT>
+                    <a:lnB w="12700" cap="flat" cmpd="sng" algn="ctr">
+                      <a:solidFill>
+                        <a:srgbClr val="E3E0EC"/>
+                      </a:solidFill>
+                      <a:prstDash val="solid"/>
+                      <a:round/>
+                      <a:headEnd type="none" w="med" len="med"/>
+                      <a:tailEnd type="none" w="med" len="med"/>
+                    </a:lnB>
+                  </a:tcPr>
+                </a:tc>
+              </a:tr>
+              <a:tr h="411480">
+                <a:tc>
+                  <a:txBody>
+                    <a:bodyPr/>
+                    <a:lstStyle/>
+                    <a:p>
+                      <a:pPr indent="0" marL="0">
+                        <a:buNone/>
+                      </a:pPr>
+                      <a:r>
+                        <a:rPr lang="en-US" sz="1250" dirty="0">
+                          <a:solidFill>
+                            <a:srgbClr val="000000"/>
+                          </a:solidFill>
+                          <a:latin typeface="Calibri" pitchFamily="34" charset="0"/>
+                          <a:ea typeface="Calibri" pitchFamily="34" charset="-122"/>
+                          <a:cs typeface="Calibri" pitchFamily="34" charset="-120"/>
+                        </a:rPr>
+                        <a:t>Base vs spoke</a:t>
+                      </a:r>
+                      <a:endParaRPr lang="en-US" sz="1250" dirty="0">
+                        <a:latin typeface="Calibri" charset="0"/>
+                        <a:ea typeface="Calibri" charset="0"/>
+                        <a:cs typeface="Calibri" charset="0"/>
+                      </a:endParaRPr>
+                    </a:p>
+                  </a:txBody>
+                  <a:tcPr marL="91440" marR="91440" marT="45720" marB="45720" anchor="ctr">
+                    <a:lnL w="12700" cap="flat" cmpd="sng" algn="ctr">
+                      <a:solidFill>
+                        <a:srgbClr val="E3E0EC"/>
+                      </a:solidFill>
+                      <a:prstDash val="solid"/>
+                      <a:round/>
+                      <a:headEnd type="none" w="med" len="med"/>
+                      <a:tailEnd type="none" w="med" len="med"/>
+                    </a:lnL>
+                    <a:lnR w="12700" cap="flat" cmpd="sng" algn="ctr">
+                      <a:solidFill>
+                        <a:srgbClr val="E3E0EC"/>
+                      </a:solidFill>
+                      <a:prstDash val="solid"/>
+                      <a:round/>
+                      <a:headEnd type="none" w="med" len="med"/>
+                      <a:tailEnd type="none" w="med" len="med"/>
+                    </a:lnR>
+                    <a:lnT w="12700" cap="flat" cmpd="sng" algn="ctr">
+                      <a:solidFill>
+                        <a:srgbClr val="E3E0EC"/>
+                      </a:solidFill>
+                      <a:prstDash val="solid"/>
+                      <a:round/>
+                      <a:headEnd type="none" w="med" len="med"/>
+                      <a:tailEnd type="none" w="med" len="med"/>
+                    </a:lnT>
+                    <a:lnB w="12700" cap="flat" cmpd="sng" algn="ctr">
+                      <a:solidFill>
+                        <a:srgbClr val="E3E0EC"/>
+                      </a:solidFill>
+                      <a:prstDash val="solid"/>
+                      <a:round/>
+                      <a:headEnd type="none" w="med" len="med"/>
+                      <a:tailEnd type="none" w="med" len="med"/>
+                    </a:lnB>
+                  </a:tcPr>
+                </a:tc>
+                <a:tc>
+                  <a:txBody>
+                    <a:bodyPr/>
+                    <a:lstStyle/>
+                    <a:p>
+                      <a:pPr indent="0" marL="0">
+                        <a:buNone/>
+                      </a:pPr>
+                      <a:r>
+                        <a:rPr lang="en-US" sz="1250" dirty="0">
+                          <a:solidFill>
+                            <a:srgbClr val="000000"/>
+                          </a:solidFill>
+                          <a:latin typeface="Calibri" pitchFamily="34" charset="0"/>
+                          <a:ea typeface="Calibri" pitchFamily="34" charset="-122"/>
+                          <a:cs typeface="Calibri" pitchFamily="34" charset="-120"/>
+                        </a:rPr>
+                        <a:t>20°</a:t>
+                      </a:r>
+                      <a:endParaRPr lang="en-US" sz="1250" dirty="0">
+                        <a:latin typeface="Calibri" charset="0"/>
+                        <a:ea typeface="Calibri" charset="0"/>
+                        <a:cs typeface="Calibri" charset="0"/>
+                      </a:endParaRPr>
+                    </a:p>
+                  </a:txBody>
+                  <a:tcPr marL="91440" marR="91440" marT="45720" marB="45720" anchor="ctr">
+                    <a:lnL w="12700" cap="flat" cmpd="sng" algn="ctr">
+                      <a:solidFill>
+                        <a:srgbClr val="E3E0EC"/>
+                      </a:solidFill>
+                      <a:prstDash val="solid"/>
+                      <a:round/>
+                      <a:headEnd type="none" w="med" len="med"/>
+                      <a:tailEnd type="none" w="med" len="med"/>
+                    </a:lnL>
+                    <a:lnR w="12700" cap="flat" cmpd="sng" algn="ctr">
+                      <a:solidFill>
+                        <a:srgbClr val="E3E0EC"/>
+                      </a:solidFill>
+                      <a:prstDash val="solid"/>
+                      <a:round/>
+                      <a:headEnd type="none" w="med" len="med"/>
+                      <a:tailEnd type="none" w="med" len="med"/>
+                    </a:lnR>
+                    <a:lnT w="12700" cap="flat" cmpd="sng" algn="ctr">
+                      <a:solidFill>
+                        <a:srgbClr val="E3E0EC"/>
+                      </a:solidFill>
+                      <a:prstDash val="solid"/>
+                      <a:round/>
+                      <a:headEnd type="none" w="med" len="med"/>
+                      <a:tailEnd type="none" w="med" len="med"/>
+                    </a:lnT>
+                    <a:lnB w="12700" cap="flat" cmpd="sng" algn="ctr">
+                      <a:solidFill>
+                        <a:srgbClr val="E3E0EC"/>
+                      </a:solidFill>
+                      <a:prstDash val="solid"/>
+                      <a:round/>
+                      <a:headEnd type="none" w="med" len="med"/>
+                      <a:tailEnd type="none" w="med" len="med"/>
+                    </a:lnB>
+                  </a:tcPr>
+                </a:tc>
+                <a:tc>
+                  <a:txBody>
+                    <a:bodyPr/>
+                    <a:lstStyle/>
+                    <a:p>
+                      <a:pPr indent="0" marL="0">
+                        <a:buNone/>
+                      </a:pPr>
+                      <a:r>
+                        <a:rPr lang="en-US" sz="1250" dirty="0">
+                          <a:solidFill>
+                            <a:srgbClr val="000000"/>
+                          </a:solidFill>
+                          <a:latin typeface="Calibri" pitchFamily="34" charset="0"/>
+                          <a:ea typeface="Calibri" pitchFamily="34" charset="-122"/>
+                          <a:cs typeface="Calibri" pitchFamily="34" charset="-120"/>
+                        </a:rPr>
+                        <a:t>20–40°</a:t>
+                      </a:r>
+                      <a:endParaRPr lang="en-US" sz="1250" dirty="0">
+                        <a:latin typeface="Calibri" charset="0"/>
+                        <a:ea typeface="Calibri" charset="0"/>
+                        <a:cs typeface="Calibri" charset="0"/>
+                      </a:endParaRPr>
+                    </a:p>
+                  </a:txBody>
+                  <a:tcPr marL="91440" marR="91440" marT="45720" marB="45720" anchor="ctr">
+                    <a:lnL w="12700" cap="flat" cmpd="sng" algn="ctr">
+                      <a:solidFill>
+                        <a:srgbClr val="E3E0EC"/>
+                      </a:solidFill>
+                      <a:prstDash val="solid"/>
+                      <a:round/>
+                      <a:headEnd type="none" w="med" len="med"/>
+                      <a:tailEnd type="none" w="med" len="med"/>
+                    </a:lnL>
+                    <a:lnR w="12700" cap="flat" cmpd="sng" algn="ctr">
+                      <a:solidFill>
+                        <a:srgbClr val="E3E0EC"/>
+                      </a:solidFill>
+                      <a:prstDash val="solid"/>
+                      <a:round/>
+                      <a:headEnd type="none" w="med" len="med"/>
+                      <a:tailEnd type="none" w="med" len="med"/>
+                    </a:lnR>
+                    <a:lnT w="12700" cap="flat" cmpd="sng" algn="ctr">
+                      <a:solidFill>
+                        <a:srgbClr val="E3E0EC"/>
+                      </a:solidFill>
+                      <a:prstDash val="solid"/>
+                      <a:round/>
+                      <a:headEnd type="none" w="med" len="med"/>
+                      <a:tailEnd type="none" w="med" len="med"/>
+                    </a:lnT>
+                    <a:lnB w="12700" cap="flat" cmpd="sng" algn="ctr">
+                      <a:solidFill>
+                        <a:srgbClr val="E3E0EC"/>
+                      </a:solidFill>
+                      <a:prstDash val="solid"/>
+                      <a:round/>
+                      <a:headEnd type="none" w="med" len="med"/>
+                      <a:tailEnd type="none" w="med" len="med"/>
+                    </a:lnB>
+                  </a:tcPr>
+                </a:tc>
+                <a:tc>
+                  <a:txBody>
+                    <a:bodyPr/>
+                    <a:lstStyle/>
+                    <a:p>
+                      <a:pPr indent="0" marL="0">
+                        <a:buNone/>
+                      </a:pPr>
+                      <a:r>
+                        <a:rPr lang="en-US" sz="1250" dirty="0">
+                          <a:solidFill>
+                            <a:srgbClr val="000000"/>
+                          </a:solidFill>
+                          <a:latin typeface="Calibri" pitchFamily="34" charset="0"/>
+                          <a:ea typeface="Calibri" pitchFamily="34" charset="-122"/>
+                          <a:cs typeface="Calibri" pitchFamily="34" charset="-120"/>
+                        </a:rPr>
+                        <a:t>&gt; 40°</a:t>
+                      </a:r>
+                      <a:endParaRPr lang="en-US" sz="1250" dirty="0">
+                        <a:latin typeface="Calibri" charset="0"/>
+                        <a:ea typeface="Calibri" charset="0"/>
+                        <a:cs typeface="Calibri" charset="0"/>
+                      </a:endParaRPr>
+                    </a:p>
+                  </a:txBody>
+                  <a:tcPr marL="91440" marR="91440" marT="45720" marB="45720" anchor="ctr">
+                    <a:lnL w="12700" cap="flat" cmpd="sng" algn="ctr">
+                      <a:solidFill>
+                        <a:srgbClr val="E3E0EC"/>
+                      </a:solidFill>
+                      <a:prstDash val="solid"/>
+                      <a:round/>
+                      <a:headEnd type="none" w="med" len="med"/>
+                      <a:tailEnd type="none" w="med" len="med"/>
+                    </a:lnL>
+                    <a:lnR w="12700" cap="flat" cmpd="sng" algn="ctr">
+                      <a:solidFill>
+                        <a:srgbClr val="E3E0EC"/>
+                      </a:solidFill>
+                      <a:prstDash val="solid"/>
+                      <a:round/>
+                      <a:headEnd type="none" w="med" len="med"/>
+                      <a:tailEnd type="none" w="med" len="med"/>
+                    </a:lnR>
+                    <a:lnT w="12700" cap="flat" cmpd="sng" algn="ctr">
+                      <a:solidFill>
+                        <a:srgbClr val="E3E0EC"/>
+                      </a:solidFill>
+                      <a:prstDash val="solid"/>
+                      <a:round/>
+                      <a:headEnd type="none" w="med" len="med"/>
+                      <a:tailEnd type="none" w="med" len="med"/>
+                    </a:lnT>
+                    <a:lnB w="12700" cap="flat" cmpd="sng" algn="ctr">
+                      <a:solidFill>
+                        <a:srgbClr val="E3E0EC"/>
+                      </a:solidFill>
+                      <a:prstDash val="solid"/>
+                      <a:round/>
+                      <a:headEnd type="none" w="med" len="med"/>
+                      <a:tailEnd type="none" w="med" len="med"/>
+                    </a:lnB>
+                  </a:tcPr>
+                </a:tc>
+                <a:tc>
+                  <a:txBody>
+                    <a:bodyPr/>
+                    <a:lstStyle/>
+                    <a:p>
+                      <a:pPr indent="0" marL="0">
+                        <a:buNone/>
+                      </a:pPr>
+                      <a:r>
+                        <a:rPr lang="en-US" sz="1250" dirty="0">
+                          <a:solidFill>
+                            <a:srgbClr val="000000"/>
+                          </a:solidFill>
+                          <a:latin typeface="Calibri" pitchFamily="34" charset="0"/>
+                          <a:ea typeface="Calibri" pitchFamily="34" charset="-122"/>
+                          <a:cs typeface="Calibri" pitchFamily="34" charset="-120"/>
+                        </a:rPr>
+                        <a:t>designed to reorient</a:t>
+                      </a:r>
+                      <a:endParaRPr lang="en-US" sz="1250" dirty="0">
+                        <a:latin typeface="Calibri" charset="0"/>
+                        <a:ea typeface="Calibri" charset="0"/>
+                        <a:cs typeface="Calibri" charset="0"/>
+                      </a:endParaRPr>
+                    </a:p>
+                  </a:txBody>
+                  <a:tcPr marL="91440" marR="91440" marT="45720" marB="45720" anchor="ctr">
+                    <a:lnL w="12700" cap="flat" cmpd="sng" algn="ctr">
+                      <a:solidFill>
+                        <a:srgbClr val="E3E0EC"/>
+                      </a:solidFill>
+                      <a:prstDash val="solid"/>
+                      <a:round/>
+                      <a:headEnd type="none" w="med" len="med"/>
+                      <a:tailEnd type="none" w="med" len="med"/>
+                    </a:lnL>
+                    <a:lnR w="12700" cap="flat" cmpd="sng" algn="ctr">
+                      <a:solidFill>
+                        <a:srgbClr val="E3E0EC"/>
+                      </a:solidFill>
+                      <a:prstDash val="solid"/>
+                      <a:round/>
+                      <a:headEnd type="none" w="med" len="med"/>
+                      <a:tailEnd type="none" w="med" len="med"/>
+                    </a:lnR>
+                    <a:lnT w="12700" cap="flat" cmpd="sng" algn="ctr">
+                      <a:solidFill>
+                        <a:srgbClr val="E3E0EC"/>
+                      </a:solidFill>
+                      <a:prstDash val="solid"/>
+                      <a:round/>
+                      <a:headEnd type="none" w="med" len="med"/>
+                      <a:tailEnd type="none" w="med" len="med"/>
+                    </a:lnT>
+                    <a:lnB w="12700" cap="flat" cmpd="sng" algn="ctr">
+                      <a:solidFill>
+                        <a:srgbClr val="E3E0EC"/>
+                      </a:solidFill>
+                      <a:prstDash val="solid"/>
+                      <a:round/>
+                      <a:headEnd type="none" w="med" len="med"/>
+                      <a:tailEnd type="none" w="med" len="med"/>
+                    </a:lnB>
+                  </a:tcPr>
+                </a:tc>
+              </a:tr>
+            </a:tbl>
+          </a:graphicData>
+        </a:graphic>
+      </p:graphicFrame>
+      <p:sp>
+        <p:nvSpPr>
+          <p:cNvPr id="6" name="Shape 3"/>
+          <p:cNvSpPr/>
+          <p:nvPr/>
+        </p:nvSpPr>
+        <p:spPr>
+          <a:xfrm>
+            <a:off x="640080" y="5394960"/>
+            <a:ext cx="10881360" cy="1188720"/>
+          </a:xfrm>
+          <a:prstGeom prst="roundRect">
+            <a:avLst>
+              <a:gd name="adj" fmla="val 6154"/>
+            </a:avLst>
+          </a:prstGeom>
+          <a:solidFill>
+            <a:srgbClr val="FFEBEE"/>
+          </a:solidFill>
+          <a:ln w="12700">
+            <a:solidFill>
+              <a:srgbClr val="FFEBEE"/>
+            </a:solidFill>
+            <a:prstDash val="solid"/>
+          </a:ln>
+        </p:spPr>
+      </p:sp>
+      <p:sp>
+        <p:nvSpPr>
+          <p:cNvPr id="7" name="Text 4"/>
+          <p:cNvSpPr/>
+          <p:nvPr/>
+        </p:nvSpPr>
+        <p:spPr>
+          <a:xfrm>
+            <a:off x="868680" y="5532120"/>
+            <a:ext cx="10424160" cy="960120"/>
+          </a:xfrm>
+          <a:prstGeom prst="rect">
+            <a:avLst/>
+          </a:prstGeom>
+          <a:noFill/>
+          <a:ln/>
+        </p:spPr>
+        <p:txBody>
+          <a:bodyPr wrap="square" lIns="0" tIns="0" rIns="0" bIns="0" rtlCol="0" anchor="ctr"/>
+          <a:lstStyle/>
+          <a:p>
+            <a:pPr indent="0" marL="0">
+              <a:buNone/>
+            </a:pPr>
+            <a:r>
+              <a:rPr lang="en-US" sz="1350" dirty="0">
+                <a:solidFill>
+                  <a:srgbClr val="8E1B1B"/>
+                </a:solidFill>
+                <a:latin typeface="Calibri" pitchFamily="34" charset="0"/>
+                <a:ea typeface="Calibri" pitchFamily="34" charset="-122"/>
+                <a:cs typeface="Calibri" pitchFamily="34" charset="-120"/>
+              </a:rPr>
+              <a:t>These are assumed tolerances, NOT verdicts on feasibility. The values were reasoned, not measured. A SAS-6 spoke shortened by 17 nm builds real centrioles, yet the model grades its linker contacts SEVERE while reporting zero clashes and a perfectly buildable geometry. Read them as “how far from wild type” and judge from the geometry itself.</a:t>
+            </a:r>
+            <a:endParaRPr lang="en-US" sz="1350" dirty="0"/>
+          </a:p>
+        </p:txBody>
+      </p:sp>
+    </p:spTree>
+  </p:cSld>
+  <p:clrMapOvr>
+    <a:masterClrMapping/>
+  </p:clrMapOvr>
+</p:sld>
+</file>
+
+<file path=ppt/slides/slide8.xml><?xml version="1.0" encoding="utf-8"?>
+<p:sld xmlns:a="http://schemas.openxmlformats.org/drawingml/2006/main" xmlns:r="http://schemas.openxmlformats.org/officeDocument/2006/relationships" xmlns:p="http://schemas.openxmlformats.org/presentationml/2006/main">
+  <p:cSld name="Slide 8">
+    <p:spTree>
+      <p:nvGrpSpPr>
+        <p:cNvPr id="1" name=""/>
+        <p:cNvGrpSpPr/>
+        <p:nvPr/>
+      </p:nvGrpSpPr>
+      <p:grpSpPr>
+        <a:xfrm>
+          <a:off x="0" y="0"/>
+          <a:ext cx="0" cy="0"/>
+          <a:chOff x="0" y="0"/>
+          <a:chExt cx="0" cy="0"/>
+        </a:xfrm>
+      </p:grpSpPr>
+      <p:sp>
+        <p:nvSpPr>
+          <p:cNvPr id="2" name="Text 0"/>
+          <p:cNvSpPr/>
+          <p:nvPr/>
+        </p:nvSpPr>
+        <p:spPr>
+          <a:xfrm>
+            <a:off x="640080" y="310896"/>
+            <a:ext cx="10881360" cy="274320"/>
+          </a:xfrm>
+          <a:prstGeom prst="rect">
+            <a:avLst/>
+          </a:prstGeom>
+          <a:noFill/>
+          <a:ln/>
+        </p:spPr>
+        <p:txBody>
+          <a:bodyPr wrap="square" rtlCol="0" anchor="ctr"/>
+          <a:lstStyle/>
+          <a:p>
+            <a:pPr indent="0" marL="0">
+              <a:buNone/>
+            </a:pPr>
+            <a:r>
+              <a:rPr lang="en-US" sz="1200" b="1" spc="200" kern="0" dirty="0">
+                <a:solidFill>
+                  <a:srgbClr val="6B3FA0"/>
+                </a:solidFill>
+                <a:latin typeface="Calibri" pitchFamily="34" charset="0"/>
+                <a:ea typeface="Calibri" pitchFamily="34" charset="-122"/>
+                <a:cs typeface="Calibri" pitchFamily="34" charset="-120"/>
+              </a:rPr>
               <a:t>VALIDATION</a:t>
             </a:r>
             <a:endParaRPr lang="en-US" sz="1200" dirty="0"/>
@@ -8376,7 +11635,7 @@
       </p:sp>
       <p:graphicFrame>
         <p:nvGraphicFramePr>
-          <p:cNvPr id="8" name="Table 0"/>
+          <p:cNvPr id="9" name="Table 0"/>
           <p:cNvGraphicFramePr>
             <a:graphicFrameLocks noGrp="1"/>
           </p:cNvGraphicFramePr>
@@ -9709,9 +12968,9 @@
 </p:sld>
 </file>
 
-<file path=ppt/slides/slide8.xml><?xml version="1.0" encoding="utf-8"?>
+<file path=ppt/slides/slide9.xml><?xml version="1.0" encoding="utf-8"?>
 <p:sld xmlns:a="http://schemas.openxmlformats.org/drawingml/2006/main" xmlns:r="http://schemas.openxmlformats.org/officeDocument/2006/relationships" xmlns:p="http://schemas.openxmlformats.org/presentationml/2006/main">
-  <p:cSld name="Slide 8">
+  <p:cSld name="Slide 9">
     <p:spTree>
       <p:nvGrpSpPr>
         <p:cNvPr id="1" name=""/>
@@ -9806,7 +13065,7 @@
       </p:sp>
       <p:graphicFrame>
         <p:nvGraphicFramePr>
-          <p:cNvPr id="9" name="Table 0"/>
+          <p:cNvPr id="10" name="Table 0"/>
           <p:cNvGraphicFramePr>
             <a:graphicFrameLocks noGrp="1"/>
           </p:cNvGraphicFramePr>
@@ -10051,7 +13310,7 @@
                           <a:ea typeface="Calibri" pitchFamily="34" charset="-122"/>
                           <a:cs typeface="Calibri" pitchFamily="34" charset="-120"/>
                         </a:rPr>
-                        <a:t>How far each connection had to turn, graded OK / HARD / FORBIDDEN against its own limits</a:t>
+                        <a:t>How far each connection had to turn, graded OK / HARD / SEVERE against its own limits (assumed tolerances, not feasibility)</a:t>
                       </a:r>
                       <a:endParaRPr lang="en-US" sz="1400" dirty="0">
                         <a:latin typeface="Calibri" charset="0"/>
@@ -10930,199 +14189,6 @@
                 <a:cs typeface="Calibri" pitchFamily="34" charset="-120"/>
               </a:rPr>
               <a:t>Read grades comparatively — mutant against wild type — rather than as absolute verdicts.</a:t>
-            </a:r>
-            <a:endParaRPr lang="en-US" sz="1400" dirty="0"/>
-          </a:p>
-        </p:txBody>
-      </p:sp>
-    </p:spTree>
-  </p:cSld>
-  <p:clrMapOvr>
-    <a:masterClrMapping/>
-  </p:clrMapOvr>
-</p:sld>
-</file>
-
-<file path=ppt/slides/slide9.xml><?xml version="1.0" encoding="utf-8"?>
-<p:sld xmlns:a="http://schemas.openxmlformats.org/drawingml/2006/main" xmlns:r="http://schemas.openxmlformats.org/officeDocument/2006/relationships" xmlns:p="http://schemas.openxmlformats.org/presentationml/2006/main">
-  <p:cSld name="Slide 9">
-    <p:spTree>
-      <p:nvGrpSpPr>
-        <p:cNvPr id="1" name=""/>
-        <p:cNvGrpSpPr/>
-        <p:nvPr/>
-      </p:nvGrpSpPr>
-      <p:grpSpPr>
-        <a:xfrm>
-          <a:off x="0" y="0"/>
-          <a:ext cx="0" cy="0"/>
-          <a:chOff x="0" y="0"/>
-          <a:chExt cx="0" cy="0"/>
-        </a:xfrm>
-      </p:grpSpPr>
-      <p:sp>
-        <p:nvSpPr>
-          <p:cNvPr id="2" name="Text 0"/>
-          <p:cNvSpPr/>
-          <p:nvPr/>
-        </p:nvSpPr>
-        <p:spPr>
-          <a:xfrm>
-            <a:off x="640080" y="310896"/>
-            <a:ext cx="10881360" cy="274320"/>
-          </a:xfrm>
-          <a:prstGeom prst="rect">
-            <a:avLst/>
-          </a:prstGeom>
-          <a:noFill/>
-          <a:ln/>
-        </p:spPr>
-        <p:txBody>
-          <a:bodyPr wrap="square" rtlCol="0" anchor="ctr"/>
-          <a:lstStyle/>
-          <a:p>
-            <a:pPr indent="0" marL="0">
-              <a:buNone/>
-            </a:pPr>
-            <a:r>
-              <a:rPr lang="en-US" sz="1200" b="1" spc="200" kern="0" dirty="0">
-                <a:solidFill>
-                  <a:srgbClr val="6B3FA0"/>
-                </a:solidFill>
-                <a:latin typeface="Calibri" pitchFamily="34" charset="0"/>
-                <a:ea typeface="Calibri" pitchFamily="34" charset="-122"/>
-                <a:cs typeface="Calibri" pitchFamily="34" charset="-120"/>
-              </a:rPr>
-              <a:t>WHAT IT IS FOR</a:t>
-            </a:r>
-            <a:endParaRPr lang="en-US" sz="1200" dirty="0"/>
-          </a:p>
-        </p:txBody>
-      </p:sp>
-      <p:sp>
-        <p:nvSpPr>
-          <p:cNvPr id="3" name="Text 1"/>
-          <p:cNvSpPr/>
-          <p:nvPr/>
-        </p:nvSpPr>
-        <p:spPr>
-          <a:xfrm>
-            <a:off x="640080" y="566928"/>
-            <a:ext cx="10881360" cy="685800"/>
-          </a:xfrm>
-          <a:prstGeom prst="rect">
-            <a:avLst/>
-          </a:prstGeom>
-          <a:noFill/>
-          <a:ln/>
-        </p:spPr>
-        <p:txBody>
-          <a:bodyPr wrap="square" rtlCol="0" anchor="ctr"/>
-          <a:lstStyle/>
-          <a:p>
-            <a:pPr indent="0" marL="0">
-              <a:buNone/>
-            </a:pPr>
-            <a:r>
-              <a:rPr lang="en-US" sz="3400" b="1" dirty="0">
-                <a:solidFill>
-                  <a:srgbClr val="1A1A1A"/>
-                </a:solidFill>
-                <a:latin typeface="Cambria" pitchFamily="34" charset="0"/>
-                <a:ea typeface="Cambria" pitchFamily="34" charset="-122"/>
-                <a:cs typeface="Cambria" pitchFamily="34" charset="-120"/>
-              </a:rPr>
-              <a:t>A worked prediction: symmetry mismatch</a:t>
-            </a:r>
-            <a:endParaRPr lang="en-US" sz="3400" dirty="0"/>
-          </a:p>
-        </p:txBody>
-      </p:sp>
-      <p:pic>
-        <p:nvPicPr>
-          <p:cNvPr id="4" name="Image 0" descr="/Users/hatzopou/Dropbox/MyDocs/Scripts/CenGeom/presentations/figs/d_mismatch.png">    </p:cNvPr>
-          <p:cNvPicPr>
-            <a:picLocks noChangeAspect="1"/>
-          </p:cNvPicPr>
-          <p:nvPr/>
-        </p:nvPicPr>
-        <p:blipFill>
-          <a:blip r:embed="rId1"/>
-          <a:stretch>
-            <a:fillRect/>
-          </a:stretch>
-        </p:blipFill>
-        <p:spPr>
-          <a:xfrm>
-            <a:off x="502920" y="1234440"/>
-            <a:ext cx="11155680" cy="3931920"/>
-          </a:xfrm>
-          <a:prstGeom prst="rect">
-            <a:avLst/>
-          </a:prstGeom>
-        </p:spPr>
-      </p:pic>
-      <p:sp>
-        <p:nvSpPr>
-          <p:cNvPr id="5" name="Shape 2"/>
-          <p:cNvSpPr/>
-          <p:nvPr/>
-        </p:nvSpPr>
-        <p:spPr>
-          <a:xfrm>
-            <a:off x="640080" y="5349240"/>
-            <a:ext cx="10881360" cy="1143000"/>
-          </a:xfrm>
-          <a:prstGeom prst="roundRect">
-            <a:avLst>
-              <a:gd name="adj" fmla="val 6400"/>
-            </a:avLst>
-          </a:prstGeom>
-          <a:solidFill>
-            <a:srgbClr val="EDE7F6"/>
-          </a:solidFill>
-          <a:ln w="12700">
-            <a:solidFill>
-              <a:srgbClr val="EDE7F6"/>
-            </a:solidFill>
-            <a:prstDash val="solid"/>
-          </a:ln>
-        </p:spPr>
-      </p:sp>
-      <p:sp>
-        <p:nvSpPr>
-          <p:cNvPr id="6" name="Text 3"/>
-          <p:cNvSpPr/>
-          <p:nvPr/>
-        </p:nvSpPr>
-        <p:spPr>
-          <a:xfrm>
-            <a:off x="868680" y="5486400"/>
-            <a:ext cx="10424160" cy="914400"/>
-          </a:xfrm>
-          <a:prstGeom prst="rect">
-            <a:avLst/>
-          </a:prstGeom>
-          <a:noFill/>
-          <a:ln/>
-        </p:spPr>
-        <p:txBody>
-          <a:bodyPr wrap="square" lIns="0" tIns="0" rIns="0" bIns="0" rtlCol="0" anchor="ctr"/>
-          <a:lstStyle/>
-          <a:p>
-            <a:pPr indent="0" marL="0">
-              <a:buNone/>
-            </a:pPr>
-            <a:r>
-              <a:rPr lang="en-US" sz="1400" dirty="0">
-                <a:solidFill>
-                  <a:srgbClr val="4A2B7A"/>
-                </a:solidFill>
-                <a:latin typeface="Calibri" pitchFamily="34" charset="0"/>
-                <a:ea typeface="Calibri" pitchFamily="34" charset="-122"/>
-                <a:cs typeface="Calibri" pitchFamily="34" charset="-120"/>
-              </a:rPr>
-              <a:t>If SAS-6 makes an 8-fold cartwheel but nine triplets are still built, the model predicts the triplet ring keeps wild-type spacing and diameter (255 nm, unchanged) while the cartwheel absorbs the entire mismatch — spokes strained to HARD, one triplet left with no pinhead at all. A fully 8-fold centriole instead shrinks to 233 nm.</a:t>
             </a:r>
             <a:endParaRPr lang="en-US" sz="1400" dirty="0"/>
           </a:p>
